--- a/Jonathan Desurmont_Mode_Trend.pptx
+++ b/Jonathan Desurmont_Mode_Trend.pptx
@@ -5,7 +5,7 @@
     <p:sldMasterId id="2147483659" r:id="rId1"/>
   </p:sldMasterIdLst>
   <p:notesMasterIdLst>
-    <p:notesMasterId r:id="rId10"/>
+    <p:notesMasterId r:id="rId11"/>
   </p:notesMasterIdLst>
   <p:sldIdLst>
     <p:sldId id="256" r:id="rId2"/>
@@ -13,33 +13,34 @@
     <p:sldId id="258" r:id="rId4"/>
     <p:sldId id="259" r:id="rId5"/>
     <p:sldId id="260" r:id="rId6"/>
-    <p:sldId id="261" r:id="rId7"/>
-    <p:sldId id="264" r:id="rId8"/>
-    <p:sldId id="263" r:id="rId9"/>
+    <p:sldId id="265" r:id="rId7"/>
+    <p:sldId id="261" r:id="rId8"/>
+    <p:sldId id="264" r:id="rId9"/>
+    <p:sldId id="263" r:id="rId10"/>
   </p:sldIdLst>
   <p:sldSz cx="9144000" cy="5143500" type="screen16x9"/>
   <p:notesSz cx="6858000" cy="9144000"/>
   <p:embeddedFontLst>
     <p:embeddedFont>
       <p:font typeface="Inter" panose="020B0604020202020204" charset="0"/>
-      <p:regular r:id="rId11"/>
-      <p:bold r:id="rId12"/>
-      <p:italic r:id="rId13"/>
-      <p:boldItalic r:id="rId14"/>
+      <p:regular r:id="rId12"/>
+      <p:bold r:id="rId13"/>
+      <p:italic r:id="rId14"/>
+      <p:boldItalic r:id="rId15"/>
     </p:embeddedFont>
     <p:embeddedFont>
       <p:font typeface="Lato" panose="020F0502020204030203" pitchFamily="34" charset="0"/>
-      <p:regular r:id="rId15"/>
-      <p:bold r:id="rId16"/>
-      <p:italic r:id="rId17"/>
-      <p:boldItalic r:id="rId18"/>
+      <p:regular r:id="rId16"/>
+      <p:bold r:id="rId17"/>
+      <p:italic r:id="rId18"/>
+      <p:boldItalic r:id="rId19"/>
     </p:embeddedFont>
     <p:embeddedFont>
       <p:font typeface="Montserrat" panose="00000500000000000000" pitchFamily="2" charset="0"/>
-      <p:regular r:id="rId19"/>
-      <p:bold r:id="rId20"/>
-      <p:italic r:id="rId21"/>
-      <p:boldItalic r:id="rId22"/>
+      <p:regular r:id="rId20"/>
+      <p:bold r:id="rId21"/>
+      <p:italic r:id="rId22"/>
+      <p:boldItalic r:id="rId23"/>
     </p:embeddedFont>
   </p:embeddedFontLst>
   <p:defaultTextStyle>
@@ -10048,10 +10049,10 @@
               <a:buNone/>
             </a:pPr>
             <a:r>
-              <a:rPr lang="fr"/>
+              <a:rPr lang="fr" dirty="0"/>
               <a:t>Fonctionnement de Segformer</a:t>
             </a:r>
-            <a:endParaRPr/>
+            <a:endParaRPr dirty="0"/>
           </a:p>
         </p:txBody>
       </p:sp>
@@ -10076,7 +10077,7 @@
         </p:spPr>
         <p:txBody>
           <a:bodyPr spcFirstLastPara="1" wrap="square" lIns="91425" tIns="91425" rIns="91425" bIns="91425" anchor="t" anchorCtr="0">
-            <a:normAutofit fontScale="92500" lnSpcReduction="10000"/>
+            <a:normAutofit fontScale="85000" lnSpcReduction="20000"/>
           </a:bodyPr>
           <a:lstStyle/>
           <a:p>
@@ -10151,6 +10152,55 @@
             </a:r>
           </a:p>
           <a:p>
+            <a:pPr marL="0" lvl="0" indent="0">
+              <a:spcAft>
+                <a:spcPts val="1200"/>
+              </a:spcAft>
+              <a:buNone/>
+            </a:pPr>
+            <a:r>
+              <a:rPr lang="fr-FR" dirty="0">
+                <a:solidFill>
+                  <a:schemeClr val="bg1"/>
+                </a:solidFill>
+              </a:rPr>
+              <a:t>Entraîné sur le </a:t>
+            </a:r>
+            <a:r>
+              <a:rPr lang="fr-FR" dirty="0" err="1">
+                <a:solidFill>
+                  <a:schemeClr val="bg1"/>
+                </a:solidFill>
+              </a:rPr>
+              <a:t>Dataset</a:t>
+            </a:r>
+            <a:r>
+              <a:rPr lang="fr-FR" dirty="0">
+                <a:solidFill>
+                  <a:schemeClr val="bg1"/>
+                </a:solidFill>
+              </a:rPr>
+              <a:t> ATR de 17 706 </a:t>
+            </a:r>
+            <a:r>
+              <a:rPr lang="fr-FR" dirty="0" err="1"/>
+              <a:t>mattmdjaga</a:t>
+            </a:r>
+            <a:r>
+              <a:rPr lang="fr-FR" dirty="0"/>
+              <a:t>/</a:t>
+            </a:r>
+            <a:r>
+              <a:rPr lang="fr-FR" dirty="0" err="1"/>
+              <a:t>human_parsing_dataset</a:t>
+            </a:r>
+            <a:endParaRPr lang="fr-FR" dirty="0">
+              <a:solidFill>
+                <a:schemeClr val="bg1"/>
+              </a:solidFill>
+            </a:endParaRPr>
+          </a:p>
+          <a:p>
             <a:pPr marL="0" lvl="0" indent="0" algn="l" rtl="0">
               <a:spcBef>
                 <a:spcPts val="0"/>
@@ -10174,7 +10224,7 @@
             </a:r>
             <a:r>
               <a:rPr lang="fr-FR" dirty="0"/>
-              <a:t>de mode en </a:t>
+              <a:t>de mode idéalement en </a:t>
             </a:r>
             <a:r>
               <a:rPr lang="fr-FR" dirty="0">
@@ -11110,6 +11160,19 @@
               </a:rPr>
               <a:t>Intersection over Union : </a:t>
             </a:r>
+            <a:r>
+              <a:rPr lang="fr-FR" dirty="0">
+                <a:solidFill>
+                  <a:schemeClr val="bg1"/>
+                </a:solidFill>
+              </a:rPr>
+              <a:t>Prédiction du pixel en fonction du masque d’entraînement</a:t>
+            </a:r>
+            <a:endParaRPr lang="fr-FR" dirty="0">
+              <a:solidFill>
+                <a:srgbClr val="FF0000"/>
+              </a:solidFill>
+            </a:endParaRPr>
           </a:p>
           <a:p>
             <a:pPr marL="0" lvl="0" indent="0" algn="l" rtl="0">
@@ -11327,6 +11390,2803 @@
   <p:cSld>
     <p:spTree>
       <p:nvGrpSpPr>
+        <p:cNvPr id="1" name=""/>
+        <p:cNvGrpSpPr/>
+        <p:nvPr/>
+      </p:nvGrpSpPr>
+      <p:grpSpPr>
+        <a:xfrm>
+          <a:off x="0" y="0"/>
+          <a:ext cx="0" cy="0"/>
+          <a:chOff x="0" y="0"/>
+          <a:chExt cx="0" cy="0"/>
+        </a:xfrm>
+      </p:grpSpPr>
+      <p:sp>
+        <p:nvSpPr>
+          <p:cNvPr id="2" name="Titre 1">
+            <a:extLst>
+              <a:ext uri="{FF2B5EF4-FFF2-40B4-BE49-F238E27FC236}">
+                <a16:creationId xmlns:a16="http://schemas.microsoft.com/office/drawing/2014/main" id="{134AA117-3BF1-8412-E6D8-9AB8A9F72FAD}"/>
+              </a:ext>
+            </a:extLst>
+          </p:cNvPr>
+          <p:cNvSpPr>
+            <a:spLocks noGrp="1"/>
+          </p:cNvSpPr>
+          <p:nvPr>
+            <p:ph type="title"/>
+          </p:nvPr>
+        </p:nvSpPr>
+        <p:spPr/>
+        <p:txBody>
+          <a:bodyPr/>
+          <a:lstStyle/>
+          <a:p>
+            <a:r>
+              <a:rPr lang="fr-FR" dirty="0" err="1"/>
+              <a:t>IoU</a:t>
+            </a:r>
+            <a:r>
+              <a:rPr lang="fr-FR" dirty="0"/>
+              <a:t> Résultats sur 50 images</a:t>
+            </a:r>
+          </a:p>
+        </p:txBody>
+      </p:sp>
+      <p:graphicFrame>
+        <p:nvGraphicFramePr>
+          <p:cNvPr id="5" name="Tableau 4">
+            <a:extLst>
+              <a:ext uri="{FF2B5EF4-FFF2-40B4-BE49-F238E27FC236}">
+                <a16:creationId xmlns:a16="http://schemas.microsoft.com/office/drawing/2014/main" id="{CA71BEAE-148E-5368-B532-2D9E27CBDA37}"/>
+              </a:ext>
+            </a:extLst>
+          </p:cNvPr>
+          <p:cNvGraphicFramePr>
+            <a:graphicFrameLocks noGrp="1"/>
+          </p:cNvGraphicFramePr>
+          <p:nvPr>
+            <p:extLst>
+              <p:ext uri="{D42A27DB-BD31-4B8C-83A1-F6EECF244321}">
+                <p14:modId xmlns:p14="http://schemas.microsoft.com/office/powerpoint/2010/main" val="3233667808"/>
+              </p:ext>
+            </p:extLst>
+          </p:nvPr>
+        </p:nvGraphicFramePr>
+        <p:xfrm>
+          <a:off x="1362734" y="1111397"/>
+          <a:ext cx="4465695" cy="3748532"/>
+        </p:xfrm>
+        <a:graphic>
+          <a:graphicData uri="http://schemas.openxmlformats.org/drawingml/2006/table">
+            <a:tbl>
+              <a:tblPr firstRow="1" firstCol="1" bandRow="1">
+                <a:tableStyleId>{5C22544A-7EE6-4342-B048-85BDC9FD1C3A}</a:tableStyleId>
+              </a:tblPr>
+              <a:tblGrid>
+                <a:gridCol w="1039794">
+                  <a:extLst>
+                    <a:ext uri="{9D8B030D-6E8A-4147-A177-3AD203B41FA5}">
+                      <a16:colId xmlns:a16="http://schemas.microsoft.com/office/drawing/2014/main" val="288118577"/>
+                    </a:ext>
+                  </a:extLst>
+                </a:gridCol>
+                <a:gridCol w="1138353">
+                  <a:extLst>
+                    <a:ext uri="{9D8B030D-6E8A-4147-A177-3AD203B41FA5}">
+                      <a16:colId xmlns:a16="http://schemas.microsoft.com/office/drawing/2014/main" val="2764965715"/>
+                    </a:ext>
+                  </a:extLst>
+                </a:gridCol>
+                <a:gridCol w="1147716">
+                  <a:extLst>
+                    <a:ext uri="{9D8B030D-6E8A-4147-A177-3AD203B41FA5}">
+                      <a16:colId xmlns:a16="http://schemas.microsoft.com/office/drawing/2014/main" val="2405408156"/>
+                    </a:ext>
+                  </a:extLst>
+                </a:gridCol>
+                <a:gridCol w="1139832">
+                  <a:extLst>
+                    <a:ext uri="{9D8B030D-6E8A-4147-A177-3AD203B41FA5}">
+                      <a16:colId xmlns:a16="http://schemas.microsoft.com/office/drawing/2014/main" val="2860821730"/>
+                    </a:ext>
+                  </a:extLst>
+                </a:gridCol>
+              </a:tblGrid>
+              <a:tr h="285770">
+                <a:tc>
+                  <a:txBody>
+                    <a:bodyPr/>
+                    <a:lstStyle/>
+                    <a:p>
+                      <a:pPr>
+                        <a:lnSpc>
+                          <a:spcPct val="107000"/>
+                        </a:lnSpc>
+                        <a:spcAft>
+                          <a:spcPts val="800"/>
+                        </a:spcAft>
+                        <a:buNone/>
+                      </a:pPr>
+                      <a:r>
+                        <a:rPr lang="fr-FR" sz="1000" kern="100">
+                          <a:effectLst/>
+                        </a:rPr>
+                        <a:t>ID </a:t>
+                      </a:r>
+                      <a:endParaRPr lang="fr-FR" sz="1000" kern="100">
+                        <a:effectLst/>
+                        <a:latin typeface="Calibri" panose="020F0502020204030204" pitchFamily="34" charset="0"/>
+                        <a:ea typeface="Calibri" panose="020F0502020204030204" pitchFamily="34" charset="0"/>
+                        <a:cs typeface="Times New Roman" panose="02020603050405020304" pitchFamily="18" charset="0"/>
+                      </a:endParaRPr>
+                    </a:p>
+                  </a:txBody>
+                  <a:tcPr marL="61854" marR="61854" marT="0" marB="0"/>
+                </a:tc>
+                <a:tc>
+                  <a:txBody>
+                    <a:bodyPr/>
+                    <a:lstStyle/>
+                    <a:p>
+                      <a:pPr>
+                        <a:lnSpc>
+                          <a:spcPct val="107000"/>
+                        </a:lnSpc>
+                        <a:spcAft>
+                          <a:spcPts val="800"/>
+                        </a:spcAft>
+                        <a:buNone/>
+                      </a:pPr>
+                      <a:r>
+                        <a:rPr lang="fr-FR" sz="1000" kern="100">
+                          <a:effectLst/>
+                        </a:rPr>
+                        <a:t>Classe d’objet</a:t>
+                      </a:r>
+                      <a:endParaRPr lang="fr-FR" sz="1000" kern="100">
+                        <a:effectLst/>
+                        <a:latin typeface="Calibri" panose="020F0502020204030204" pitchFamily="34" charset="0"/>
+                        <a:ea typeface="Calibri" panose="020F0502020204030204" pitchFamily="34" charset="0"/>
+                        <a:cs typeface="Times New Roman" panose="02020603050405020304" pitchFamily="18" charset="0"/>
+                      </a:endParaRPr>
+                    </a:p>
+                  </a:txBody>
+                  <a:tcPr marL="61854" marR="61854" marT="0" marB="0"/>
+                </a:tc>
+                <a:tc>
+                  <a:txBody>
+                    <a:bodyPr/>
+                    <a:lstStyle/>
+                    <a:p>
+                      <a:pPr>
+                        <a:lnSpc>
+                          <a:spcPct val="107000"/>
+                        </a:lnSpc>
+                        <a:spcAft>
+                          <a:spcPts val="800"/>
+                        </a:spcAft>
+                        <a:buNone/>
+                      </a:pPr>
+                      <a:r>
+                        <a:rPr lang="fr-FR" sz="1000" kern="100" dirty="0" err="1">
+                          <a:effectLst/>
+                        </a:rPr>
+                        <a:t>IoU</a:t>
+                      </a:r>
+                      <a:r>
+                        <a:rPr lang="fr-FR" sz="1000" kern="100" dirty="0">
+                          <a:effectLst/>
+                        </a:rPr>
+                        <a:t> Avancé par le concepteur du modèle</a:t>
+                      </a:r>
+                      <a:endParaRPr lang="fr-FR" sz="1000" kern="100" dirty="0">
+                        <a:effectLst/>
+                        <a:latin typeface="Calibri" panose="020F0502020204030204" pitchFamily="34" charset="0"/>
+                        <a:ea typeface="Calibri" panose="020F0502020204030204" pitchFamily="34" charset="0"/>
+                        <a:cs typeface="Times New Roman" panose="02020603050405020304" pitchFamily="18" charset="0"/>
+                      </a:endParaRPr>
+                    </a:p>
+                  </a:txBody>
+                  <a:tcPr marL="61854" marR="61854" marT="0" marB="0"/>
+                </a:tc>
+                <a:tc>
+                  <a:txBody>
+                    <a:bodyPr/>
+                    <a:lstStyle/>
+                    <a:p>
+                      <a:pPr>
+                        <a:lnSpc>
+                          <a:spcPct val="107000"/>
+                        </a:lnSpc>
+                        <a:spcAft>
+                          <a:spcPts val="800"/>
+                        </a:spcAft>
+                        <a:buNone/>
+                      </a:pPr>
+                      <a:r>
+                        <a:rPr lang="fr-FR" sz="1000" kern="100">
+                          <a:effectLst/>
+                        </a:rPr>
+                        <a:t>IoU sur mes 50 images arrondi </a:t>
+                      </a:r>
+                      <a:endParaRPr lang="fr-FR" sz="1000" kern="100">
+                        <a:effectLst/>
+                        <a:latin typeface="Calibri" panose="020F0502020204030204" pitchFamily="34" charset="0"/>
+                        <a:ea typeface="Calibri" panose="020F0502020204030204" pitchFamily="34" charset="0"/>
+                        <a:cs typeface="Times New Roman" panose="02020603050405020304" pitchFamily="18" charset="0"/>
+                      </a:endParaRPr>
+                    </a:p>
+                  </a:txBody>
+                  <a:tcPr marL="61854" marR="61854" marT="0" marB="0"/>
+                </a:tc>
+                <a:extLst>
+                  <a:ext uri="{0D108BD9-81ED-4DB2-BD59-A6C34878D82A}">
+                    <a16:rowId xmlns:a16="http://schemas.microsoft.com/office/drawing/2014/main" val="2463122149"/>
+                  </a:ext>
+                </a:extLst>
+              </a:tr>
+              <a:tr h="139175">
+                <a:tc>
+                  <a:txBody>
+                    <a:bodyPr/>
+                    <a:lstStyle/>
+                    <a:p>
+                      <a:pPr>
+                        <a:lnSpc>
+                          <a:spcPct val="107000"/>
+                        </a:lnSpc>
+                        <a:spcAft>
+                          <a:spcPts val="800"/>
+                        </a:spcAft>
+                        <a:buNone/>
+                      </a:pPr>
+                      <a:r>
+                        <a:rPr lang="fr-FR" sz="1000" kern="100">
+                          <a:effectLst/>
+                        </a:rPr>
+                        <a:t>0 </a:t>
+                      </a:r>
+                      <a:endParaRPr lang="fr-FR" sz="1000" kern="100">
+                        <a:effectLst/>
+                        <a:latin typeface="Calibri" panose="020F0502020204030204" pitchFamily="34" charset="0"/>
+                        <a:ea typeface="Calibri" panose="020F0502020204030204" pitchFamily="34" charset="0"/>
+                        <a:cs typeface="Times New Roman" panose="02020603050405020304" pitchFamily="18" charset="0"/>
+                      </a:endParaRPr>
+                    </a:p>
+                  </a:txBody>
+                  <a:tcPr marL="61854" marR="61854" marT="0" marB="0"/>
+                </a:tc>
+                <a:tc>
+                  <a:txBody>
+                    <a:bodyPr/>
+                    <a:lstStyle/>
+                    <a:p>
+                      <a:pPr>
+                        <a:lnSpc>
+                          <a:spcPct val="107000"/>
+                        </a:lnSpc>
+                        <a:spcAft>
+                          <a:spcPts val="800"/>
+                        </a:spcAft>
+                        <a:buNone/>
+                      </a:pPr>
+                      <a:r>
+                        <a:rPr lang="fr-FR" sz="1000" kern="100">
+                          <a:effectLst/>
+                        </a:rPr>
+                        <a:t>Arrière-Plan </a:t>
+                      </a:r>
+                      <a:endParaRPr lang="fr-FR" sz="1000" kern="100">
+                        <a:effectLst/>
+                        <a:latin typeface="Calibri" panose="020F0502020204030204" pitchFamily="34" charset="0"/>
+                        <a:ea typeface="Calibri" panose="020F0502020204030204" pitchFamily="34" charset="0"/>
+                        <a:cs typeface="Times New Roman" panose="02020603050405020304" pitchFamily="18" charset="0"/>
+                      </a:endParaRPr>
+                    </a:p>
+                  </a:txBody>
+                  <a:tcPr marL="61854" marR="61854" marT="0" marB="0"/>
+                </a:tc>
+                <a:tc>
+                  <a:txBody>
+                    <a:bodyPr/>
+                    <a:lstStyle/>
+                    <a:p>
+                      <a:pPr>
+                        <a:lnSpc>
+                          <a:spcPct val="107000"/>
+                        </a:lnSpc>
+                        <a:spcAft>
+                          <a:spcPts val="800"/>
+                        </a:spcAft>
+                        <a:buNone/>
+                      </a:pPr>
+                      <a:r>
+                        <a:rPr lang="fr-FR" sz="1000" kern="100">
+                          <a:effectLst/>
+                        </a:rPr>
+                        <a:t>0.99</a:t>
+                      </a:r>
+                      <a:endParaRPr lang="fr-FR" sz="1000" kern="100">
+                        <a:effectLst/>
+                        <a:latin typeface="Calibri" panose="020F0502020204030204" pitchFamily="34" charset="0"/>
+                        <a:ea typeface="Calibri" panose="020F0502020204030204" pitchFamily="34" charset="0"/>
+                        <a:cs typeface="Times New Roman" panose="02020603050405020304" pitchFamily="18" charset="0"/>
+                      </a:endParaRPr>
+                    </a:p>
+                  </a:txBody>
+                  <a:tcPr marL="61854" marR="61854" marT="0" marB="0"/>
+                </a:tc>
+                <a:tc>
+                  <a:txBody>
+                    <a:bodyPr/>
+                    <a:lstStyle/>
+                    <a:p>
+                      <a:pPr>
+                        <a:lnSpc>
+                          <a:spcPct val="107000"/>
+                        </a:lnSpc>
+                        <a:spcAft>
+                          <a:spcPts val="800"/>
+                        </a:spcAft>
+                        <a:buNone/>
+                      </a:pPr>
+                      <a:r>
+                        <a:rPr lang="fr-FR" sz="1000" kern="100">
+                          <a:effectLst/>
+                        </a:rPr>
+                        <a:t>0.99</a:t>
+                      </a:r>
+                      <a:endParaRPr lang="fr-FR" sz="1000" kern="100">
+                        <a:effectLst/>
+                        <a:latin typeface="Calibri" panose="020F0502020204030204" pitchFamily="34" charset="0"/>
+                        <a:ea typeface="Calibri" panose="020F0502020204030204" pitchFamily="34" charset="0"/>
+                        <a:cs typeface="Times New Roman" panose="02020603050405020304" pitchFamily="18" charset="0"/>
+                      </a:endParaRPr>
+                    </a:p>
+                  </a:txBody>
+                  <a:tcPr marL="61854" marR="61854" marT="0" marB="0"/>
+                </a:tc>
+                <a:extLst>
+                  <a:ext uri="{0D108BD9-81ED-4DB2-BD59-A6C34878D82A}">
+                    <a16:rowId xmlns:a16="http://schemas.microsoft.com/office/drawing/2014/main" val="1330390693"/>
+                  </a:ext>
+                </a:extLst>
+              </a:tr>
+              <a:tr h="139175">
+                <a:tc>
+                  <a:txBody>
+                    <a:bodyPr/>
+                    <a:lstStyle/>
+                    <a:p>
+                      <a:pPr>
+                        <a:lnSpc>
+                          <a:spcPct val="107000"/>
+                        </a:lnSpc>
+                        <a:spcAft>
+                          <a:spcPts val="800"/>
+                        </a:spcAft>
+                        <a:buNone/>
+                      </a:pPr>
+                      <a:r>
+                        <a:rPr lang="fr-FR" sz="1000" kern="100">
+                          <a:effectLst/>
+                        </a:rPr>
+                        <a:t>1</a:t>
+                      </a:r>
+                      <a:endParaRPr lang="fr-FR" sz="1000" kern="100">
+                        <a:effectLst/>
+                        <a:latin typeface="Calibri" panose="020F0502020204030204" pitchFamily="34" charset="0"/>
+                        <a:ea typeface="Calibri" panose="020F0502020204030204" pitchFamily="34" charset="0"/>
+                        <a:cs typeface="Times New Roman" panose="02020603050405020304" pitchFamily="18" charset="0"/>
+                      </a:endParaRPr>
+                    </a:p>
+                  </a:txBody>
+                  <a:tcPr marL="61854" marR="61854" marT="0" marB="0"/>
+                </a:tc>
+                <a:tc>
+                  <a:txBody>
+                    <a:bodyPr/>
+                    <a:lstStyle/>
+                    <a:p>
+                      <a:pPr>
+                        <a:lnSpc>
+                          <a:spcPct val="107000"/>
+                        </a:lnSpc>
+                        <a:spcAft>
+                          <a:spcPts val="800"/>
+                        </a:spcAft>
+                        <a:buNone/>
+                      </a:pPr>
+                      <a:r>
+                        <a:rPr lang="fr-FR" sz="1000" kern="100">
+                          <a:effectLst/>
+                        </a:rPr>
+                        <a:t>Chapeau</a:t>
+                      </a:r>
+                      <a:endParaRPr lang="fr-FR" sz="1000" kern="100">
+                        <a:effectLst/>
+                        <a:latin typeface="Calibri" panose="020F0502020204030204" pitchFamily="34" charset="0"/>
+                        <a:ea typeface="Calibri" panose="020F0502020204030204" pitchFamily="34" charset="0"/>
+                        <a:cs typeface="Times New Roman" panose="02020603050405020304" pitchFamily="18" charset="0"/>
+                      </a:endParaRPr>
+                    </a:p>
+                  </a:txBody>
+                  <a:tcPr marL="61854" marR="61854" marT="0" marB="0"/>
+                </a:tc>
+                <a:tc>
+                  <a:txBody>
+                    <a:bodyPr/>
+                    <a:lstStyle/>
+                    <a:p>
+                      <a:pPr>
+                        <a:lnSpc>
+                          <a:spcPct val="107000"/>
+                        </a:lnSpc>
+                        <a:spcAft>
+                          <a:spcPts val="800"/>
+                        </a:spcAft>
+                        <a:buNone/>
+                      </a:pPr>
+                      <a:r>
+                        <a:rPr lang="fr-FR" sz="1000" kern="100">
+                          <a:effectLst/>
+                        </a:rPr>
+                        <a:t>0.68</a:t>
+                      </a:r>
+                      <a:endParaRPr lang="fr-FR" sz="1000" kern="100">
+                        <a:effectLst/>
+                        <a:latin typeface="Calibri" panose="020F0502020204030204" pitchFamily="34" charset="0"/>
+                        <a:ea typeface="Calibri" panose="020F0502020204030204" pitchFamily="34" charset="0"/>
+                        <a:cs typeface="Times New Roman" panose="02020603050405020304" pitchFamily="18" charset="0"/>
+                      </a:endParaRPr>
+                    </a:p>
+                  </a:txBody>
+                  <a:tcPr marL="61854" marR="61854" marT="0" marB="0"/>
+                </a:tc>
+                <a:tc>
+                  <a:txBody>
+                    <a:bodyPr/>
+                    <a:lstStyle/>
+                    <a:p>
+                      <a:pPr>
+                        <a:lnSpc>
+                          <a:spcPct val="107000"/>
+                        </a:lnSpc>
+                        <a:spcAft>
+                          <a:spcPts val="800"/>
+                        </a:spcAft>
+                        <a:buNone/>
+                      </a:pPr>
+                      <a:r>
+                        <a:rPr lang="fr-FR" sz="1000" kern="100">
+                          <a:effectLst/>
+                        </a:rPr>
+                        <a:t>0.86</a:t>
+                      </a:r>
+                      <a:endParaRPr lang="fr-FR" sz="1000" kern="100">
+                        <a:effectLst/>
+                        <a:latin typeface="Calibri" panose="020F0502020204030204" pitchFamily="34" charset="0"/>
+                        <a:ea typeface="Calibri" panose="020F0502020204030204" pitchFamily="34" charset="0"/>
+                        <a:cs typeface="Times New Roman" panose="02020603050405020304" pitchFamily="18" charset="0"/>
+                      </a:endParaRPr>
+                    </a:p>
+                  </a:txBody>
+                  <a:tcPr marL="61854" marR="61854" marT="0" marB="0"/>
+                </a:tc>
+                <a:extLst>
+                  <a:ext uri="{0D108BD9-81ED-4DB2-BD59-A6C34878D82A}">
+                    <a16:rowId xmlns:a16="http://schemas.microsoft.com/office/drawing/2014/main" val="1981702643"/>
+                  </a:ext>
+                </a:extLst>
+              </a:tr>
+              <a:tr h="139175">
+                <a:tc>
+                  <a:txBody>
+                    <a:bodyPr/>
+                    <a:lstStyle/>
+                    <a:p>
+                      <a:pPr>
+                        <a:lnSpc>
+                          <a:spcPct val="107000"/>
+                        </a:lnSpc>
+                        <a:spcAft>
+                          <a:spcPts val="800"/>
+                        </a:spcAft>
+                        <a:buNone/>
+                      </a:pPr>
+                      <a:r>
+                        <a:rPr lang="fr-FR" sz="1000" kern="100">
+                          <a:effectLst/>
+                        </a:rPr>
+                        <a:t>2</a:t>
+                      </a:r>
+                      <a:endParaRPr lang="fr-FR" sz="1000" kern="100">
+                        <a:effectLst/>
+                        <a:latin typeface="Calibri" panose="020F0502020204030204" pitchFamily="34" charset="0"/>
+                        <a:ea typeface="Calibri" panose="020F0502020204030204" pitchFamily="34" charset="0"/>
+                        <a:cs typeface="Times New Roman" panose="02020603050405020304" pitchFamily="18" charset="0"/>
+                      </a:endParaRPr>
+                    </a:p>
+                  </a:txBody>
+                  <a:tcPr marL="61854" marR="61854" marT="0" marB="0"/>
+                </a:tc>
+                <a:tc>
+                  <a:txBody>
+                    <a:bodyPr/>
+                    <a:lstStyle/>
+                    <a:p>
+                      <a:pPr>
+                        <a:lnSpc>
+                          <a:spcPct val="107000"/>
+                        </a:lnSpc>
+                        <a:spcAft>
+                          <a:spcPts val="800"/>
+                        </a:spcAft>
+                        <a:buNone/>
+                      </a:pPr>
+                      <a:r>
+                        <a:rPr lang="fr-FR" sz="1000" kern="100">
+                          <a:effectLst/>
+                        </a:rPr>
+                        <a:t>Cheveux</a:t>
+                      </a:r>
+                      <a:endParaRPr lang="fr-FR" sz="1000" kern="100">
+                        <a:effectLst/>
+                        <a:latin typeface="Calibri" panose="020F0502020204030204" pitchFamily="34" charset="0"/>
+                        <a:ea typeface="Calibri" panose="020F0502020204030204" pitchFamily="34" charset="0"/>
+                        <a:cs typeface="Times New Roman" panose="02020603050405020304" pitchFamily="18" charset="0"/>
+                      </a:endParaRPr>
+                    </a:p>
+                  </a:txBody>
+                  <a:tcPr marL="61854" marR="61854" marT="0" marB="0"/>
+                </a:tc>
+                <a:tc>
+                  <a:txBody>
+                    <a:bodyPr/>
+                    <a:lstStyle/>
+                    <a:p>
+                      <a:pPr>
+                        <a:lnSpc>
+                          <a:spcPct val="107000"/>
+                        </a:lnSpc>
+                        <a:spcAft>
+                          <a:spcPts val="800"/>
+                        </a:spcAft>
+                        <a:buNone/>
+                      </a:pPr>
+                      <a:r>
+                        <a:rPr lang="fr-FR" sz="1000" kern="100">
+                          <a:effectLst/>
+                        </a:rPr>
+                        <a:t>0.82</a:t>
+                      </a:r>
+                      <a:endParaRPr lang="fr-FR" sz="1000" kern="100">
+                        <a:effectLst/>
+                        <a:latin typeface="Calibri" panose="020F0502020204030204" pitchFamily="34" charset="0"/>
+                        <a:ea typeface="Calibri" panose="020F0502020204030204" pitchFamily="34" charset="0"/>
+                        <a:cs typeface="Times New Roman" panose="02020603050405020304" pitchFamily="18" charset="0"/>
+                      </a:endParaRPr>
+                    </a:p>
+                  </a:txBody>
+                  <a:tcPr marL="61854" marR="61854" marT="0" marB="0"/>
+                </a:tc>
+                <a:tc>
+                  <a:txBody>
+                    <a:bodyPr/>
+                    <a:lstStyle/>
+                    <a:p>
+                      <a:pPr>
+                        <a:lnSpc>
+                          <a:spcPct val="107000"/>
+                        </a:lnSpc>
+                        <a:spcAft>
+                          <a:spcPts val="800"/>
+                        </a:spcAft>
+                        <a:buNone/>
+                      </a:pPr>
+                      <a:r>
+                        <a:rPr lang="fr-FR" sz="1000" kern="100">
+                          <a:effectLst/>
+                        </a:rPr>
+                        <a:t>0.81</a:t>
+                      </a:r>
+                      <a:endParaRPr lang="fr-FR" sz="1000" kern="100">
+                        <a:effectLst/>
+                        <a:latin typeface="Calibri" panose="020F0502020204030204" pitchFamily="34" charset="0"/>
+                        <a:ea typeface="Calibri" panose="020F0502020204030204" pitchFamily="34" charset="0"/>
+                        <a:cs typeface="Times New Roman" panose="02020603050405020304" pitchFamily="18" charset="0"/>
+                      </a:endParaRPr>
+                    </a:p>
+                  </a:txBody>
+                  <a:tcPr marL="61854" marR="61854" marT="0" marB="0"/>
+                </a:tc>
+                <a:extLst>
+                  <a:ext uri="{0D108BD9-81ED-4DB2-BD59-A6C34878D82A}">
+                    <a16:rowId xmlns:a16="http://schemas.microsoft.com/office/drawing/2014/main" val="3295943197"/>
+                  </a:ext>
+                </a:extLst>
+              </a:tr>
+              <a:tr h="139175">
+                <a:tc>
+                  <a:txBody>
+                    <a:bodyPr/>
+                    <a:lstStyle/>
+                    <a:p>
+                      <a:pPr>
+                        <a:lnSpc>
+                          <a:spcPct val="107000"/>
+                        </a:lnSpc>
+                        <a:spcAft>
+                          <a:spcPts val="800"/>
+                        </a:spcAft>
+                        <a:buNone/>
+                      </a:pPr>
+                      <a:r>
+                        <a:rPr lang="fr-FR" sz="1000" kern="100">
+                          <a:effectLst/>
+                        </a:rPr>
+                        <a:t>3</a:t>
+                      </a:r>
+                      <a:endParaRPr lang="fr-FR" sz="1000" kern="100">
+                        <a:effectLst/>
+                        <a:latin typeface="Calibri" panose="020F0502020204030204" pitchFamily="34" charset="0"/>
+                        <a:ea typeface="Calibri" panose="020F0502020204030204" pitchFamily="34" charset="0"/>
+                        <a:cs typeface="Times New Roman" panose="02020603050405020304" pitchFamily="18" charset="0"/>
+                      </a:endParaRPr>
+                    </a:p>
+                  </a:txBody>
+                  <a:tcPr marL="61854" marR="61854" marT="0" marB="0"/>
+                </a:tc>
+                <a:tc>
+                  <a:txBody>
+                    <a:bodyPr/>
+                    <a:lstStyle/>
+                    <a:p>
+                      <a:pPr>
+                        <a:lnSpc>
+                          <a:spcPct val="107000"/>
+                        </a:lnSpc>
+                        <a:spcAft>
+                          <a:spcPts val="800"/>
+                        </a:spcAft>
+                        <a:buNone/>
+                      </a:pPr>
+                      <a:r>
+                        <a:rPr lang="fr-FR" sz="1000" kern="100">
+                          <a:effectLst/>
+                        </a:rPr>
+                        <a:t>Lunettes de soleil</a:t>
+                      </a:r>
+                      <a:endParaRPr lang="fr-FR" sz="1000" kern="100">
+                        <a:effectLst/>
+                        <a:latin typeface="Calibri" panose="020F0502020204030204" pitchFamily="34" charset="0"/>
+                        <a:ea typeface="Calibri" panose="020F0502020204030204" pitchFamily="34" charset="0"/>
+                        <a:cs typeface="Times New Roman" panose="02020603050405020304" pitchFamily="18" charset="0"/>
+                      </a:endParaRPr>
+                    </a:p>
+                  </a:txBody>
+                  <a:tcPr marL="61854" marR="61854" marT="0" marB="0"/>
+                </a:tc>
+                <a:tc>
+                  <a:txBody>
+                    <a:bodyPr/>
+                    <a:lstStyle/>
+                    <a:p>
+                      <a:pPr>
+                        <a:lnSpc>
+                          <a:spcPct val="107000"/>
+                        </a:lnSpc>
+                        <a:spcAft>
+                          <a:spcPts val="800"/>
+                        </a:spcAft>
+                        <a:buNone/>
+                      </a:pPr>
+                      <a:r>
+                        <a:rPr lang="fr-FR" sz="1000" kern="100">
+                          <a:effectLst/>
+                        </a:rPr>
+                        <a:t>0.63</a:t>
+                      </a:r>
+                      <a:endParaRPr lang="fr-FR" sz="1000" kern="100">
+                        <a:effectLst/>
+                        <a:latin typeface="Calibri" panose="020F0502020204030204" pitchFamily="34" charset="0"/>
+                        <a:ea typeface="Calibri" panose="020F0502020204030204" pitchFamily="34" charset="0"/>
+                        <a:cs typeface="Times New Roman" panose="02020603050405020304" pitchFamily="18" charset="0"/>
+                      </a:endParaRPr>
+                    </a:p>
+                  </a:txBody>
+                  <a:tcPr marL="61854" marR="61854" marT="0" marB="0"/>
+                </a:tc>
+                <a:tc>
+                  <a:txBody>
+                    <a:bodyPr/>
+                    <a:lstStyle/>
+                    <a:p>
+                      <a:pPr>
+                        <a:lnSpc>
+                          <a:spcPct val="107000"/>
+                        </a:lnSpc>
+                        <a:spcAft>
+                          <a:spcPts val="800"/>
+                        </a:spcAft>
+                        <a:buNone/>
+                      </a:pPr>
+                      <a:r>
+                        <a:rPr lang="fr-FR" sz="1000" kern="100">
+                          <a:effectLst/>
+                        </a:rPr>
+                        <a:t>0.70</a:t>
+                      </a:r>
+                      <a:endParaRPr lang="fr-FR" sz="1000" kern="100">
+                        <a:effectLst/>
+                        <a:latin typeface="Calibri" panose="020F0502020204030204" pitchFamily="34" charset="0"/>
+                        <a:ea typeface="Calibri" panose="020F0502020204030204" pitchFamily="34" charset="0"/>
+                        <a:cs typeface="Times New Roman" panose="02020603050405020304" pitchFamily="18" charset="0"/>
+                      </a:endParaRPr>
+                    </a:p>
+                  </a:txBody>
+                  <a:tcPr marL="61854" marR="61854" marT="0" marB="0"/>
+                </a:tc>
+                <a:extLst>
+                  <a:ext uri="{0D108BD9-81ED-4DB2-BD59-A6C34878D82A}">
+                    <a16:rowId xmlns:a16="http://schemas.microsoft.com/office/drawing/2014/main" val="2234616980"/>
+                  </a:ext>
+                </a:extLst>
+              </a:tr>
+              <a:tr h="139175">
+                <a:tc>
+                  <a:txBody>
+                    <a:bodyPr/>
+                    <a:lstStyle/>
+                    <a:p>
+                      <a:pPr>
+                        <a:lnSpc>
+                          <a:spcPct val="107000"/>
+                        </a:lnSpc>
+                        <a:spcAft>
+                          <a:spcPts val="800"/>
+                        </a:spcAft>
+                        <a:buNone/>
+                      </a:pPr>
+                      <a:r>
+                        <a:rPr lang="fr-FR" sz="1000" kern="100">
+                          <a:effectLst/>
+                        </a:rPr>
+                        <a:t>4</a:t>
+                      </a:r>
+                      <a:endParaRPr lang="fr-FR" sz="1000" kern="100">
+                        <a:effectLst/>
+                        <a:latin typeface="Calibri" panose="020F0502020204030204" pitchFamily="34" charset="0"/>
+                        <a:ea typeface="Calibri" panose="020F0502020204030204" pitchFamily="34" charset="0"/>
+                        <a:cs typeface="Times New Roman" panose="02020603050405020304" pitchFamily="18" charset="0"/>
+                      </a:endParaRPr>
+                    </a:p>
+                  </a:txBody>
+                  <a:tcPr marL="61854" marR="61854" marT="0" marB="0"/>
+                </a:tc>
+                <a:tc>
+                  <a:txBody>
+                    <a:bodyPr/>
+                    <a:lstStyle/>
+                    <a:p>
+                      <a:pPr>
+                        <a:lnSpc>
+                          <a:spcPct val="107000"/>
+                        </a:lnSpc>
+                        <a:spcAft>
+                          <a:spcPts val="800"/>
+                        </a:spcAft>
+                        <a:buNone/>
+                      </a:pPr>
+                      <a:r>
+                        <a:rPr lang="fr-FR" sz="1000" kern="100">
+                          <a:effectLst/>
+                        </a:rPr>
+                        <a:t>Haut</a:t>
+                      </a:r>
+                      <a:endParaRPr lang="fr-FR" sz="1000" kern="100">
+                        <a:effectLst/>
+                        <a:latin typeface="Calibri" panose="020F0502020204030204" pitchFamily="34" charset="0"/>
+                        <a:ea typeface="Calibri" panose="020F0502020204030204" pitchFamily="34" charset="0"/>
+                        <a:cs typeface="Times New Roman" panose="02020603050405020304" pitchFamily="18" charset="0"/>
+                      </a:endParaRPr>
+                    </a:p>
+                  </a:txBody>
+                  <a:tcPr marL="61854" marR="61854" marT="0" marB="0"/>
+                </a:tc>
+                <a:tc>
+                  <a:txBody>
+                    <a:bodyPr/>
+                    <a:lstStyle/>
+                    <a:p>
+                      <a:pPr>
+                        <a:lnSpc>
+                          <a:spcPct val="107000"/>
+                        </a:lnSpc>
+                        <a:spcAft>
+                          <a:spcPts val="800"/>
+                        </a:spcAft>
+                        <a:buNone/>
+                      </a:pPr>
+                      <a:r>
+                        <a:rPr lang="fr-FR" sz="1000" kern="100">
+                          <a:effectLst/>
+                        </a:rPr>
+                        <a:t>0.78</a:t>
+                      </a:r>
+                      <a:endParaRPr lang="fr-FR" sz="1000" kern="100">
+                        <a:effectLst/>
+                        <a:latin typeface="Calibri" panose="020F0502020204030204" pitchFamily="34" charset="0"/>
+                        <a:ea typeface="Calibri" panose="020F0502020204030204" pitchFamily="34" charset="0"/>
+                        <a:cs typeface="Times New Roman" panose="02020603050405020304" pitchFamily="18" charset="0"/>
+                      </a:endParaRPr>
+                    </a:p>
+                  </a:txBody>
+                  <a:tcPr marL="61854" marR="61854" marT="0" marB="0"/>
+                </a:tc>
+                <a:tc>
+                  <a:txBody>
+                    <a:bodyPr/>
+                    <a:lstStyle/>
+                    <a:p>
+                      <a:pPr>
+                        <a:lnSpc>
+                          <a:spcPct val="107000"/>
+                        </a:lnSpc>
+                        <a:spcAft>
+                          <a:spcPts val="800"/>
+                        </a:spcAft>
+                        <a:buNone/>
+                      </a:pPr>
+                      <a:r>
+                        <a:rPr lang="fr-FR" sz="1000" kern="100">
+                          <a:effectLst/>
+                        </a:rPr>
+                        <a:t>0.89</a:t>
+                      </a:r>
+                      <a:endParaRPr lang="fr-FR" sz="1000" kern="100">
+                        <a:effectLst/>
+                        <a:latin typeface="Calibri" panose="020F0502020204030204" pitchFamily="34" charset="0"/>
+                        <a:ea typeface="Calibri" panose="020F0502020204030204" pitchFamily="34" charset="0"/>
+                        <a:cs typeface="Times New Roman" panose="02020603050405020304" pitchFamily="18" charset="0"/>
+                      </a:endParaRPr>
+                    </a:p>
+                  </a:txBody>
+                  <a:tcPr marL="61854" marR="61854" marT="0" marB="0"/>
+                </a:tc>
+                <a:extLst>
+                  <a:ext uri="{0D108BD9-81ED-4DB2-BD59-A6C34878D82A}">
+                    <a16:rowId xmlns:a16="http://schemas.microsoft.com/office/drawing/2014/main" val="4075252039"/>
+                  </a:ext>
+                </a:extLst>
+              </a:tr>
+              <a:tr h="139175">
+                <a:tc>
+                  <a:txBody>
+                    <a:bodyPr/>
+                    <a:lstStyle/>
+                    <a:p>
+                      <a:pPr>
+                        <a:lnSpc>
+                          <a:spcPct val="107000"/>
+                        </a:lnSpc>
+                        <a:spcAft>
+                          <a:spcPts val="800"/>
+                        </a:spcAft>
+                        <a:buNone/>
+                      </a:pPr>
+                      <a:r>
+                        <a:rPr lang="fr-FR" sz="1000" kern="100">
+                          <a:effectLst/>
+                        </a:rPr>
+                        <a:t>5</a:t>
+                      </a:r>
+                      <a:endParaRPr lang="fr-FR" sz="1000" kern="100">
+                        <a:effectLst/>
+                        <a:latin typeface="Calibri" panose="020F0502020204030204" pitchFamily="34" charset="0"/>
+                        <a:ea typeface="Calibri" panose="020F0502020204030204" pitchFamily="34" charset="0"/>
+                        <a:cs typeface="Times New Roman" panose="02020603050405020304" pitchFamily="18" charset="0"/>
+                      </a:endParaRPr>
+                    </a:p>
+                  </a:txBody>
+                  <a:tcPr marL="61854" marR="61854" marT="0" marB="0"/>
+                </a:tc>
+                <a:tc>
+                  <a:txBody>
+                    <a:bodyPr/>
+                    <a:lstStyle/>
+                    <a:p>
+                      <a:pPr>
+                        <a:lnSpc>
+                          <a:spcPct val="107000"/>
+                        </a:lnSpc>
+                        <a:spcAft>
+                          <a:spcPts val="800"/>
+                        </a:spcAft>
+                        <a:buNone/>
+                      </a:pPr>
+                      <a:r>
+                        <a:rPr lang="fr-FR" sz="1000" kern="100">
+                          <a:effectLst/>
+                        </a:rPr>
+                        <a:t>Jupe</a:t>
+                      </a:r>
+                      <a:endParaRPr lang="fr-FR" sz="1000" kern="100">
+                        <a:effectLst/>
+                        <a:latin typeface="Calibri" panose="020F0502020204030204" pitchFamily="34" charset="0"/>
+                        <a:ea typeface="Calibri" panose="020F0502020204030204" pitchFamily="34" charset="0"/>
+                        <a:cs typeface="Times New Roman" panose="02020603050405020304" pitchFamily="18" charset="0"/>
+                      </a:endParaRPr>
+                    </a:p>
+                  </a:txBody>
+                  <a:tcPr marL="61854" marR="61854" marT="0" marB="0"/>
+                </a:tc>
+                <a:tc>
+                  <a:txBody>
+                    <a:bodyPr/>
+                    <a:lstStyle/>
+                    <a:p>
+                      <a:pPr>
+                        <a:lnSpc>
+                          <a:spcPct val="107000"/>
+                        </a:lnSpc>
+                        <a:spcAft>
+                          <a:spcPts val="800"/>
+                        </a:spcAft>
+                        <a:buNone/>
+                      </a:pPr>
+                      <a:r>
+                        <a:rPr lang="fr-FR" sz="1000" kern="100">
+                          <a:effectLst/>
+                        </a:rPr>
+                        <a:t>0.65</a:t>
+                      </a:r>
+                      <a:endParaRPr lang="fr-FR" sz="1000" kern="100">
+                        <a:effectLst/>
+                        <a:latin typeface="Calibri" panose="020F0502020204030204" pitchFamily="34" charset="0"/>
+                        <a:ea typeface="Calibri" panose="020F0502020204030204" pitchFamily="34" charset="0"/>
+                        <a:cs typeface="Times New Roman" panose="02020603050405020304" pitchFamily="18" charset="0"/>
+                      </a:endParaRPr>
+                    </a:p>
+                  </a:txBody>
+                  <a:tcPr marL="61854" marR="61854" marT="0" marB="0"/>
+                </a:tc>
+                <a:tc>
+                  <a:txBody>
+                    <a:bodyPr/>
+                    <a:lstStyle/>
+                    <a:p>
+                      <a:pPr>
+                        <a:lnSpc>
+                          <a:spcPct val="107000"/>
+                        </a:lnSpc>
+                        <a:spcAft>
+                          <a:spcPts val="800"/>
+                        </a:spcAft>
+                        <a:buNone/>
+                      </a:pPr>
+                      <a:r>
+                        <a:rPr lang="fr-FR" sz="1000" kern="100">
+                          <a:effectLst/>
+                        </a:rPr>
+                        <a:t>0.94</a:t>
+                      </a:r>
+                      <a:endParaRPr lang="fr-FR" sz="1000" kern="100">
+                        <a:effectLst/>
+                        <a:latin typeface="Calibri" panose="020F0502020204030204" pitchFamily="34" charset="0"/>
+                        <a:ea typeface="Calibri" panose="020F0502020204030204" pitchFamily="34" charset="0"/>
+                        <a:cs typeface="Times New Roman" panose="02020603050405020304" pitchFamily="18" charset="0"/>
+                      </a:endParaRPr>
+                    </a:p>
+                  </a:txBody>
+                  <a:tcPr marL="61854" marR="61854" marT="0" marB="0"/>
+                </a:tc>
+                <a:extLst>
+                  <a:ext uri="{0D108BD9-81ED-4DB2-BD59-A6C34878D82A}">
+                    <a16:rowId xmlns:a16="http://schemas.microsoft.com/office/drawing/2014/main" val="855330832"/>
+                  </a:ext>
+                </a:extLst>
+              </a:tr>
+              <a:tr h="139175">
+                <a:tc>
+                  <a:txBody>
+                    <a:bodyPr/>
+                    <a:lstStyle/>
+                    <a:p>
+                      <a:pPr>
+                        <a:lnSpc>
+                          <a:spcPct val="107000"/>
+                        </a:lnSpc>
+                        <a:spcAft>
+                          <a:spcPts val="800"/>
+                        </a:spcAft>
+                        <a:buNone/>
+                      </a:pPr>
+                      <a:r>
+                        <a:rPr lang="fr-FR" sz="1000" kern="100">
+                          <a:effectLst/>
+                        </a:rPr>
+                        <a:t>6</a:t>
+                      </a:r>
+                      <a:endParaRPr lang="fr-FR" sz="1000" kern="100">
+                        <a:effectLst/>
+                        <a:latin typeface="Calibri" panose="020F0502020204030204" pitchFamily="34" charset="0"/>
+                        <a:ea typeface="Calibri" panose="020F0502020204030204" pitchFamily="34" charset="0"/>
+                        <a:cs typeface="Times New Roman" panose="02020603050405020304" pitchFamily="18" charset="0"/>
+                      </a:endParaRPr>
+                    </a:p>
+                  </a:txBody>
+                  <a:tcPr marL="61854" marR="61854" marT="0" marB="0"/>
+                </a:tc>
+                <a:tc>
+                  <a:txBody>
+                    <a:bodyPr/>
+                    <a:lstStyle/>
+                    <a:p>
+                      <a:pPr>
+                        <a:lnSpc>
+                          <a:spcPct val="107000"/>
+                        </a:lnSpc>
+                        <a:spcAft>
+                          <a:spcPts val="800"/>
+                        </a:spcAft>
+                        <a:buNone/>
+                      </a:pPr>
+                      <a:r>
+                        <a:rPr lang="fr-FR" sz="1000" kern="100">
+                          <a:effectLst/>
+                        </a:rPr>
+                        <a:t>Pantalon</a:t>
+                      </a:r>
+                      <a:endParaRPr lang="fr-FR" sz="1000" kern="100">
+                        <a:effectLst/>
+                        <a:latin typeface="Calibri" panose="020F0502020204030204" pitchFamily="34" charset="0"/>
+                        <a:ea typeface="Calibri" panose="020F0502020204030204" pitchFamily="34" charset="0"/>
+                        <a:cs typeface="Times New Roman" panose="02020603050405020304" pitchFamily="18" charset="0"/>
+                      </a:endParaRPr>
+                    </a:p>
+                  </a:txBody>
+                  <a:tcPr marL="61854" marR="61854" marT="0" marB="0"/>
+                </a:tc>
+                <a:tc>
+                  <a:txBody>
+                    <a:bodyPr/>
+                    <a:lstStyle/>
+                    <a:p>
+                      <a:pPr>
+                        <a:lnSpc>
+                          <a:spcPct val="107000"/>
+                        </a:lnSpc>
+                        <a:spcAft>
+                          <a:spcPts val="800"/>
+                        </a:spcAft>
+                        <a:buNone/>
+                      </a:pPr>
+                      <a:r>
+                        <a:rPr lang="fr-FR" sz="1000" kern="100">
+                          <a:effectLst/>
+                        </a:rPr>
+                        <a:t>0.84</a:t>
+                      </a:r>
+                      <a:endParaRPr lang="fr-FR" sz="1000" kern="100">
+                        <a:effectLst/>
+                        <a:latin typeface="Calibri" panose="020F0502020204030204" pitchFamily="34" charset="0"/>
+                        <a:ea typeface="Calibri" panose="020F0502020204030204" pitchFamily="34" charset="0"/>
+                        <a:cs typeface="Times New Roman" panose="02020603050405020304" pitchFamily="18" charset="0"/>
+                      </a:endParaRPr>
+                    </a:p>
+                  </a:txBody>
+                  <a:tcPr marL="61854" marR="61854" marT="0" marB="0"/>
+                </a:tc>
+                <a:tc>
+                  <a:txBody>
+                    <a:bodyPr/>
+                    <a:lstStyle/>
+                    <a:p>
+                      <a:pPr>
+                        <a:lnSpc>
+                          <a:spcPct val="107000"/>
+                        </a:lnSpc>
+                        <a:spcAft>
+                          <a:spcPts val="800"/>
+                        </a:spcAft>
+                        <a:buNone/>
+                      </a:pPr>
+                      <a:r>
+                        <a:rPr lang="fr-FR" sz="1000" kern="100">
+                          <a:effectLst/>
+                        </a:rPr>
+                        <a:t>0.91</a:t>
+                      </a:r>
+                      <a:endParaRPr lang="fr-FR" sz="1000" kern="100">
+                        <a:effectLst/>
+                        <a:latin typeface="Calibri" panose="020F0502020204030204" pitchFamily="34" charset="0"/>
+                        <a:ea typeface="Calibri" panose="020F0502020204030204" pitchFamily="34" charset="0"/>
+                        <a:cs typeface="Times New Roman" panose="02020603050405020304" pitchFamily="18" charset="0"/>
+                      </a:endParaRPr>
+                    </a:p>
+                  </a:txBody>
+                  <a:tcPr marL="61854" marR="61854" marT="0" marB="0"/>
+                </a:tc>
+                <a:extLst>
+                  <a:ext uri="{0D108BD9-81ED-4DB2-BD59-A6C34878D82A}">
+                    <a16:rowId xmlns:a16="http://schemas.microsoft.com/office/drawing/2014/main" val="2958546916"/>
+                  </a:ext>
+                </a:extLst>
+              </a:tr>
+              <a:tr h="139175">
+                <a:tc>
+                  <a:txBody>
+                    <a:bodyPr/>
+                    <a:lstStyle/>
+                    <a:p>
+                      <a:pPr>
+                        <a:lnSpc>
+                          <a:spcPct val="107000"/>
+                        </a:lnSpc>
+                        <a:spcAft>
+                          <a:spcPts val="800"/>
+                        </a:spcAft>
+                        <a:buNone/>
+                      </a:pPr>
+                      <a:r>
+                        <a:rPr lang="fr-FR" sz="1000" kern="100">
+                          <a:effectLst/>
+                        </a:rPr>
+                        <a:t>7</a:t>
+                      </a:r>
+                      <a:endParaRPr lang="fr-FR" sz="1000" kern="100">
+                        <a:effectLst/>
+                        <a:latin typeface="Calibri" panose="020F0502020204030204" pitchFamily="34" charset="0"/>
+                        <a:ea typeface="Calibri" panose="020F0502020204030204" pitchFamily="34" charset="0"/>
+                        <a:cs typeface="Times New Roman" panose="02020603050405020304" pitchFamily="18" charset="0"/>
+                      </a:endParaRPr>
+                    </a:p>
+                  </a:txBody>
+                  <a:tcPr marL="61854" marR="61854" marT="0" marB="0"/>
+                </a:tc>
+                <a:tc>
+                  <a:txBody>
+                    <a:bodyPr/>
+                    <a:lstStyle/>
+                    <a:p>
+                      <a:pPr>
+                        <a:lnSpc>
+                          <a:spcPct val="107000"/>
+                        </a:lnSpc>
+                        <a:spcAft>
+                          <a:spcPts val="800"/>
+                        </a:spcAft>
+                        <a:buNone/>
+                      </a:pPr>
+                      <a:r>
+                        <a:rPr lang="fr-FR" sz="1000" kern="100">
+                          <a:effectLst/>
+                        </a:rPr>
+                        <a:t>Robe</a:t>
+                      </a:r>
+                      <a:endParaRPr lang="fr-FR" sz="1000" kern="100">
+                        <a:effectLst/>
+                        <a:latin typeface="Calibri" panose="020F0502020204030204" pitchFamily="34" charset="0"/>
+                        <a:ea typeface="Calibri" panose="020F0502020204030204" pitchFamily="34" charset="0"/>
+                        <a:cs typeface="Times New Roman" panose="02020603050405020304" pitchFamily="18" charset="0"/>
+                      </a:endParaRPr>
+                    </a:p>
+                  </a:txBody>
+                  <a:tcPr marL="61854" marR="61854" marT="0" marB="0"/>
+                </a:tc>
+                <a:tc>
+                  <a:txBody>
+                    <a:bodyPr/>
+                    <a:lstStyle/>
+                    <a:p>
+                      <a:pPr>
+                        <a:lnSpc>
+                          <a:spcPct val="107000"/>
+                        </a:lnSpc>
+                        <a:spcAft>
+                          <a:spcPts val="800"/>
+                        </a:spcAft>
+                        <a:buNone/>
+                      </a:pPr>
+                      <a:r>
+                        <a:rPr lang="fr-FR" sz="1000" kern="100">
+                          <a:effectLst/>
+                        </a:rPr>
+                        <a:t>0.55</a:t>
+                      </a:r>
+                      <a:endParaRPr lang="fr-FR" sz="1000" kern="100">
+                        <a:effectLst/>
+                        <a:latin typeface="Calibri" panose="020F0502020204030204" pitchFamily="34" charset="0"/>
+                        <a:ea typeface="Calibri" panose="020F0502020204030204" pitchFamily="34" charset="0"/>
+                        <a:cs typeface="Times New Roman" panose="02020603050405020304" pitchFamily="18" charset="0"/>
+                      </a:endParaRPr>
+                    </a:p>
+                  </a:txBody>
+                  <a:tcPr marL="61854" marR="61854" marT="0" marB="0"/>
+                </a:tc>
+                <a:tc>
+                  <a:txBody>
+                    <a:bodyPr/>
+                    <a:lstStyle/>
+                    <a:p>
+                      <a:pPr>
+                        <a:lnSpc>
+                          <a:spcPct val="107000"/>
+                        </a:lnSpc>
+                        <a:spcAft>
+                          <a:spcPts val="800"/>
+                        </a:spcAft>
+                        <a:buNone/>
+                      </a:pPr>
+                      <a:r>
+                        <a:rPr lang="fr-FR" sz="1000" kern="100">
+                          <a:effectLst/>
+                        </a:rPr>
+                        <a:t>0.80</a:t>
+                      </a:r>
+                      <a:endParaRPr lang="fr-FR" sz="1000" kern="100">
+                        <a:effectLst/>
+                        <a:latin typeface="Calibri" panose="020F0502020204030204" pitchFamily="34" charset="0"/>
+                        <a:ea typeface="Calibri" panose="020F0502020204030204" pitchFamily="34" charset="0"/>
+                        <a:cs typeface="Times New Roman" panose="02020603050405020304" pitchFamily="18" charset="0"/>
+                      </a:endParaRPr>
+                    </a:p>
+                  </a:txBody>
+                  <a:tcPr marL="61854" marR="61854" marT="0" marB="0"/>
+                </a:tc>
+                <a:extLst>
+                  <a:ext uri="{0D108BD9-81ED-4DB2-BD59-A6C34878D82A}">
+                    <a16:rowId xmlns:a16="http://schemas.microsoft.com/office/drawing/2014/main" val="1376669373"/>
+                  </a:ext>
+                </a:extLst>
+              </a:tr>
+              <a:tr h="139175">
+                <a:tc>
+                  <a:txBody>
+                    <a:bodyPr/>
+                    <a:lstStyle/>
+                    <a:p>
+                      <a:pPr>
+                        <a:lnSpc>
+                          <a:spcPct val="107000"/>
+                        </a:lnSpc>
+                        <a:spcAft>
+                          <a:spcPts val="800"/>
+                        </a:spcAft>
+                        <a:buNone/>
+                      </a:pPr>
+                      <a:r>
+                        <a:rPr lang="fr-FR" sz="1000" kern="100">
+                          <a:effectLst/>
+                        </a:rPr>
+                        <a:t>8</a:t>
+                      </a:r>
+                      <a:endParaRPr lang="fr-FR" sz="1000" kern="100">
+                        <a:effectLst/>
+                        <a:latin typeface="Calibri" panose="020F0502020204030204" pitchFamily="34" charset="0"/>
+                        <a:ea typeface="Calibri" panose="020F0502020204030204" pitchFamily="34" charset="0"/>
+                        <a:cs typeface="Times New Roman" panose="02020603050405020304" pitchFamily="18" charset="0"/>
+                      </a:endParaRPr>
+                    </a:p>
+                  </a:txBody>
+                  <a:tcPr marL="61854" marR="61854" marT="0" marB="0"/>
+                </a:tc>
+                <a:tc>
+                  <a:txBody>
+                    <a:bodyPr/>
+                    <a:lstStyle/>
+                    <a:p>
+                      <a:pPr>
+                        <a:lnSpc>
+                          <a:spcPct val="107000"/>
+                        </a:lnSpc>
+                        <a:spcAft>
+                          <a:spcPts val="800"/>
+                        </a:spcAft>
+                        <a:buNone/>
+                      </a:pPr>
+                      <a:r>
+                        <a:rPr lang="fr-FR" sz="1000" kern="100">
+                          <a:effectLst/>
+                        </a:rPr>
+                        <a:t>Ceinture</a:t>
+                      </a:r>
+                      <a:endParaRPr lang="fr-FR" sz="1000" kern="100">
+                        <a:effectLst/>
+                        <a:latin typeface="Calibri" panose="020F0502020204030204" pitchFamily="34" charset="0"/>
+                        <a:ea typeface="Calibri" panose="020F0502020204030204" pitchFamily="34" charset="0"/>
+                        <a:cs typeface="Times New Roman" panose="02020603050405020304" pitchFamily="18" charset="0"/>
+                      </a:endParaRPr>
+                    </a:p>
+                  </a:txBody>
+                  <a:tcPr marL="61854" marR="61854" marT="0" marB="0"/>
+                </a:tc>
+                <a:tc>
+                  <a:txBody>
+                    <a:bodyPr/>
+                    <a:lstStyle/>
+                    <a:p>
+                      <a:pPr>
+                        <a:lnSpc>
+                          <a:spcPct val="107000"/>
+                        </a:lnSpc>
+                        <a:spcAft>
+                          <a:spcPts val="800"/>
+                        </a:spcAft>
+                        <a:buNone/>
+                      </a:pPr>
+                      <a:r>
+                        <a:rPr lang="fr-FR" sz="1000" kern="100">
+                          <a:effectLst/>
+                        </a:rPr>
+                        <a:t>0.30</a:t>
+                      </a:r>
+                      <a:endParaRPr lang="fr-FR" sz="1000" kern="100">
+                        <a:effectLst/>
+                        <a:latin typeface="Calibri" panose="020F0502020204030204" pitchFamily="34" charset="0"/>
+                        <a:ea typeface="Calibri" panose="020F0502020204030204" pitchFamily="34" charset="0"/>
+                        <a:cs typeface="Times New Roman" panose="02020603050405020304" pitchFamily="18" charset="0"/>
+                      </a:endParaRPr>
+                    </a:p>
+                  </a:txBody>
+                  <a:tcPr marL="61854" marR="61854" marT="0" marB="0"/>
+                </a:tc>
+                <a:tc>
+                  <a:txBody>
+                    <a:bodyPr/>
+                    <a:lstStyle/>
+                    <a:p>
+                      <a:pPr>
+                        <a:lnSpc>
+                          <a:spcPct val="107000"/>
+                        </a:lnSpc>
+                        <a:spcAft>
+                          <a:spcPts val="800"/>
+                        </a:spcAft>
+                        <a:buNone/>
+                      </a:pPr>
+                      <a:r>
+                        <a:rPr lang="fr-FR" sz="1000" kern="100">
+                          <a:effectLst/>
+                        </a:rPr>
+                        <a:t>0.56</a:t>
+                      </a:r>
+                      <a:endParaRPr lang="fr-FR" sz="1000" kern="100">
+                        <a:effectLst/>
+                        <a:latin typeface="Calibri" panose="020F0502020204030204" pitchFamily="34" charset="0"/>
+                        <a:ea typeface="Calibri" panose="020F0502020204030204" pitchFamily="34" charset="0"/>
+                        <a:cs typeface="Times New Roman" panose="02020603050405020304" pitchFamily="18" charset="0"/>
+                      </a:endParaRPr>
+                    </a:p>
+                  </a:txBody>
+                  <a:tcPr marL="61854" marR="61854" marT="0" marB="0"/>
+                </a:tc>
+                <a:extLst>
+                  <a:ext uri="{0D108BD9-81ED-4DB2-BD59-A6C34878D82A}">
+                    <a16:rowId xmlns:a16="http://schemas.microsoft.com/office/drawing/2014/main" val="14832478"/>
+                  </a:ext>
+                </a:extLst>
+              </a:tr>
+              <a:tr h="139175">
+                <a:tc>
+                  <a:txBody>
+                    <a:bodyPr/>
+                    <a:lstStyle/>
+                    <a:p>
+                      <a:pPr>
+                        <a:lnSpc>
+                          <a:spcPct val="107000"/>
+                        </a:lnSpc>
+                        <a:spcAft>
+                          <a:spcPts val="800"/>
+                        </a:spcAft>
+                        <a:buNone/>
+                      </a:pPr>
+                      <a:r>
+                        <a:rPr lang="fr-FR" sz="1000" kern="100">
+                          <a:effectLst/>
+                        </a:rPr>
+                        <a:t>9</a:t>
+                      </a:r>
+                      <a:endParaRPr lang="fr-FR" sz="1000" kern="100">
+                        <a:effectLst/>
+                        <a:latin typeface="Calibri" panose="020F0502020204030204" pitchFamily="34" charset="0"/>
+                        <a:ea typeface="Calibri" panose="020F0502020204030204" pitchFamily="34" charset="0"/>
+                        <a:cs typeface="Times New Roman" panose="02020603050405020304" pitchFamily="18" charset="0"/>
+                      </a:endParaRPr>
+                    </a:p>
+                  </a:txBody>
+                  <a:tcPr marL="61854" marR="61854" marT="0" marB="0"/>
+                </a:tc>
+                <a:tc>
+                  <a:txBody>
+                    <a:bodyPr/>
+                    <a:lstStyle/>
+                    <a:p>
+                      <a:pPr>
+                        <a:lnSpc>
+                          <a:spcPct val="107000"/>
+                        </a:lnSpc>
+                        <a:spcAft>
+                          <a:spcPts val="800"/>
+                        </a:spcAft>
+                        <a:buNone/>
+                      </a:pPr>
+                      <a:r>
+                        <a:rPr lang="fr-FR" sz="1000" kern="100">
+                          <a:effectLst/>
+                        </a:rPr>
+                        <a:t>Chaussures</a:t>
+                      </a:r>
+                      <a:endParaRPr lang="fr-FR" sz="1000" kern="100">
+                        <a:effectLst/>
+                        <a:latin typeface="Calibri" panose="020F0502020204030204" pitchFamily="34" charset="0"/>
+                        <a:ea typeface="Calibri" panose="020F0502020204030204" pitchFamily="34" charset="0"/>
+                        <a:cs typeface="Times New Roman" panose="02020603050405020304" pitchFamily="18" charset="0"/>
+                      </a:endParaRPr>
+                    </a:p>
+                  </a:txBody>
+                  <a:tcPr marL="61854" marR="61854" marT="0" marB="0"/>
+                </a:tc>
+                <a:tc>
+                  <a:txBody>
+                    <a:bodyPr/>
+                    <a:lstStyle/>
+                    <a:p>
+                      <a:pPr>
+                        <a:lnSpc>
+                          <a:spcPct val="107000"/>
+                        </a:lnSpc>
+                        <a:spcAft>
+                          <a:spcPts val="800"/>
+                        </a:spcAft>
+                        <a:buNone/>
+                      </a:pPr>
+                      <a:r>
+                        <a:rPr lang="fr-FR" sz="1000" kern="100">
+                          <a:effectLst/>
+                        </a:rPr>
+                        <a:t>0.59</a:t>
+                      </a:r>
+                      <a:endParaRPr lang="fr-FR" sz="1000" kern="100">
+                        <a:effectLst/>
+                        <a:latin typeface="Calibri" panose="020F0502020204030204" pitchFamily="34" charset="0"/>
+                        <a:ea typeface="Calibri" panose="020F0502020204030204" pitchFamily="34" charset="0"/>
+                        <a:cs typeface="Times New Roman" panose="02020603050405020304" pitchFamily="18" charset="0"/>
+                      </a:endParaRPr>
+                    </a:p>
+                  </a:txBody>
+                  <a:tcPr marL="61854" marR="61854" marT="0" marB="0"/>
+                </a:tc>
+                <a:tc>
+                  <a:txBody>
+                    <a:bodyPr/>
+                    <a:lstStyle/>
+                    <a:p>
+                      <a:pPr>
+                        <a:lnSpc>
+                          <a:spcPct val="107000"/>
+                        </a:lnSpc>
+                        <a:spcAft>
+                          <a:spcPts val="800"/>
+                        </a:spcAft>
+                        <a:buNone/>
+                      </a:pPr>
+                      <a:r>
+                        <a:rPr lang="fr-FR" sz="1000" kern="100">
+                          <a:effectLst/>
+                        </a:rPr>
+                        <a:t>0.76</a:t>
+                      </a:r>
+                      <a:endParaRPr lang="fr-FR" sz="1000" kern="100">
+                        <a:effectLst/>
+                        <a:latin typeface="Calibri" panose="020F0502020204030204" pitchFamily="34" charset="0"/>
+                        <a:ea typeface="Calibri" panose="020F0502020204030204" pitchFamily="34" charset="0"/>
+                        <a:cs typeface="Times New Roman" panose="02020603050405020304" pitchFamily="18" charset="0"/>
+                      </a:endParaRPr>
+                    </a:p>
+                  </a:txBody>
+                  <a:tcPr marL="61854" marR="61854" marT="0" marB="0"/>
+                </a:tc>
+                <a:extLst>
+                  <a:ext uri="{0D108BD9-81ED-4DB2-BD59-A6C34878D82A}">
+                    <a16:rowId xmlns:a16="http://schemas.microsoft.com/office/drawing/2014/main" val="1576238610"/>
+                  </a:ext>
+                </a:extLst>
+              </a:tr>
+              <a:tr h="139175">
+                <a:tc>
+                  <a:txBody>
+                    <a:bodyPr/>
+                    <a:lstStyle/>
+                    <a:p>
+                      <a:pPr>
+                        <a:lnSpc>
+                          <a:spcPct val="107000"/>
+                        </a:lnSpc>
+                        <a:spcAft>
+                          <a:spcPts val="800"/>
+                        </a:spcAft>
+                        <a:buNone/>
+                      </a:pPr>
+                      <a:r>
+                        <a:rPr lang="fr-FR" sz="1000" kern="100">
+                          <a:effectLst/>
+                        </a:rPr>
+                        <a:t>10</a:t>
+                      </a:r>
+                      <a:endParaRPr lang="fr-FR" sz="1000" kern="100">
+                        <a:effectLst/>
+                        <a:latin typeface="Calibri" panose="020F0502020204030204" pitchFamily="34" charset="0"/>
+                        <a:ea typeface="Calibri" panose="020F0502020204030204" pitchFamily="34" charset="0"/>
+                        <a:cs typeface="Times New Roman" panose="02020603050405020304" pitchFamily="18" charset="0"/>
+                      </a:endParaRPr>
+                    </a:p>
+                  </a:txBody>
+                  <a:tcPr marL="61854" marR="61854" marT="0" marB="0"/>
+                </a:tc>
+                <a:tc>
+                  <a:txBody>
+                    <a:bodyPr/>
+                    <a:lstStyle/>
+                    <a:p>
+                      <a:pPr>
+                        <a:lnSpc>
+                          <a:spcPct val="107000"/>
+                        </a:lnSpc>
+                        <a:spcAft>
+                          <a:spcPts val="800"/>
+                        </a:spcAft>
+                        <a:buNone/>
+                      </a:pPr>
+                      <a:r>
+                        <a:rPr lang="fr-FR" sz="1000" kern="100">
+                          <a:effectLst/>
+                        </a:rPr>
+                        <a:t>Visage</a:t>
+                      </a:r>
+                      <a:endParaRPr lang="fr-FR" sz="1000" kern="100">
+                        <a:effectLst/>
+                        <a:latin typeface="Calibri" panose="020F0502020204030204" pitchFamily="34" charset="0"/>
+                        <a:ea typeface="Calibri" panose="020F0502020204030204" pitchFamily="34" charset="0"/>
+                        <a:cs typeface="Times New Roman" panose="02020603050405020304" pitchFamily="18" charset="0"/>
+                      </a:endParaRPr>
+                    </a:p>
+                  </a:txBody>
+                  <a:tcPr marL="61854" marR="61854" marT="0" marB="0"/>
+                </a:tc>
+                <a:tc>
+                  <a:txBody>
+                    <a:bodyPr/>
+                    <a:lstStyle/>
+                    <a:p>
+                      <a:pPr>
+                        <a:lnSpc>
+                          <a:spcPct val="107000"/>
+                        </a:lnSpc>
+                        <a:spcAft>
+                          <a:spcPts val="800"/>
+                        </a:spcAft>
+                        <a:buNone/>
+                      </a:pPr>
+                      <a:r>
+                        <a:rPr lang="fr-FR" sz="1000" kern="100">
+                          <a:effectLst/>
+                        </a:rPr>
+                        <a:t>0.85</a:t>
+                      </a:r>
+                      <a:endParaRPr lang="fr-FR" sz="1000" kern="100">
+                        <a:effectLst/>
+                        <a:latin typeface="Calibri" panose="020F0502020204030204" pitchFamily="34" charset="0"/>
+                        <a:ea typeface="Calibri" panose="020F0502020204030204" pitchFamily="34" charset="0"/>
+                        <a:cs typeface="Times New Roman" panose="02020603050405020304" pitchFamily="18" charset="0"/>
+                      </a:endParaRPr>
+                    </a:p>
+                  </a:txBody>
+                  <a:tcPr marL="61854" marR="61854" marT="0" marB="0"/>
+                </a:tc>
+                <a:tc>
+                  <a:txBody>
+                    <a:bodyPr/>
+                    <a:lstStyle/>
+                    <a:p>
+                      <a:pPr>
+                        <a:lnSpc>
+                          <a:spcPct val="107000"/>
+                        </a:lnSpc>
+                        <a:spcAft>
+                          <a:spcPts val="800"/>
+                        </a:spcAft>
+                        <a:buNone/>
+                      </a:pPr>
+                      <a:r>
+                        <a:rPr lang="fr-FR" sz="1000" kern="100">
+                          <a:effectLst/>
+                        </a:rPr>
+                        <a:t>0.84</a:t>
+                      </a:r>
+                      <a:endParaRPr lang="fr-FR" sz="1000" kern="100">
+                        <a:effectLst/>
+                        <a:latin typeface="Calibri" panose="020F0502020204030204" pitchFamily="34" charset="0"/>
+                        <a:ea typeface="Calibri" panose="020F0502020204030204" pitchFamily="34" charset="0"/>
+                        <a:cs typeface="Times New Roman" panose="02020603050405020304" pitchFamily="18" charset="0"/>
+                      </a:endParaRPr>
+                    </a:p>
+                  </a:txBody>
+                  <a:tcPr marL="61854" marR="61854" marT="0" marB="0"/>
+                </a:tc>
+                <a:extLst>
+                  <a:ext uri="{0D108BD9-81ED-4DB2-BD59-A6C34878D82A}">
+                    <a16:rowId xmlns:a16="http://schemas.microsoft.com/office/drawing/2014/main" val="4196556579"/>
+                  </a:ext>
+                </a:extLst>
+              </a:tr>
+              <a:tr h="139175">
+                <a:tc>
+                  <a:txBody>
+                    <a:bodyPr/>
+                    <a:lstStyle/>
+                    <a:p>
+                      <a:pPr>
+                        <a:lnSpc>
+                          <a:spcPct val="107000"/>
+                        </a:lnSpc>
+                        <a:spcAft>
+                          <a:spcPts val="800"/>
+                        </a:spcAft>
+                        <a:buNone/>
+                      </a:pPr>
+                      <a:r>
+                        <a:rPr lang="fr-FR" sz="1000" kern="100">
+                          <a:effectLst/>
+                        </a:rPr>
+                        <a:t>11</a:t>
+                      </a:r>
+                      <a:endParaRPr lang="fr-FR" sz="1000" kern="100">
+                        <a:effectLst/>
+                        <a:latin typeface="Calibri" panose="020F0502020204030204" pitchFamily="34" charset="0"/>
+                        <a:ea typeface="Calibri" panose="020F0502020204030204" pitchFamily="34" charset="0"/>
+                        <a:cs typeface="Times New Roman" panose="02020603050405020304" pitchFamily="18" charset="0"/>
+                      </a:endParaRPr>
+                    </a:p>
+                  </a:txBody>
+                  <a:tcPr marL="61854" marR="61854" marT="0" marB="0"/>
+                </a:tc>
+                <a:tc>
+                  <a:txBody>
+                    <a:bodyPr/>
+                    <a:lstStyle/>
+                    <a:p>
+                      <a:pPr>
+                        <a:lnSpc>
+                          <a:spcPct val="107000"/>
+                        </a:lnSpc>
+                        <a:spcAft>
+                          <a:spcPts val="800"/>
+                        </a:spcAft>
+                        <a:buNone/>
+                      </a:pPr>
+                      <a:r>
+                        <a:rPr lang="fr-FR" sz="1000" kern="100">
+                          <a:effectLst/>
+                        </a:rPr>
+                        <a:t>Jambe gauche</a:t>
+                      </a:r>
+                      <a:endParaRPr lang="fr-FR" sz="1000" kern="100">
+                        <a:effectLst/>
+                        <a:latin typeface="Calibri" panose="020F0502020204030204" pitchFamily="34" charset="0"/>
+                        <a:ea typeface="Calibri" panose="020F0502020204030204" pitchFamily="34" charset="0"/>
+                        <a:cs typeface="Times New Roman" panose="02020603050405020304" pitchFamily="18" charset="0"/>
+                      </a:endParaRPr>
+                    </a:p>
+                  </a:txBody>
+                  <a:tcPr marL="61854" marR="61854" marT="0" marB="0"/>
+                </a:tc>
+                <a:tc>
+                  <a:txBody>
+                    <a:bodyPr/>
+                    <a:lstStyle/>
+                    <a:p>
+                      <a:pPr>
+                        <a:lnSpc>
+                          <a:spcPct val="107000"/>
+                        </a:lnSpc>
+                        <a:spcAft>
+                          <a:spcPts val="800"/>
+                        </a:spcAft>
+                        <a:buNone/>
+                      </a:pPr>
+                      <a:r>
+                        <a:rPr lang="fr-FR" sz="1000" kern="100">
+                          <a:effectLst/>
+                        </a:rPr>
+                        <a:t>0.82</a:t>
+                      </a:r>
+                      <a:endParaRPr lang="fr-FR" sz="1000" kern="100">
+                        <a:effectLst/>
+                        <a:latin typeface="Calibri" panose="020F0502020204030204" pitchFamily="34" charset="0"/>
+                        <a:ea typeface="Calibri" panose="020F0502020204030204" pitchFamily="34" charset="0"/>
+                        <a:cs typeface="Times New Roman" panose="02020603050405020304" pitchFamily="18" charset="0"/>
+                      </a:endParaRPr>
+                    </a:p>
+                  </a:txBody>
+                  <a:tcPr marL="61854" marR="61854" marT="0" marB="0"/>
+                </a:tc>
+                <a:tc>
+                  <a:txBody>
+                    <a:bodyPr/>
+                    <a:lstStyle/>
+                    <a:p>
+                      <a:pPr>
+                        <a:lnSpc>
+                          <a:spcPct val="107000"/>
+                        </a:lnSpc>
+                        <a:spcAft>
+                          <a:spcPts val="800"/>
+                        </a:spcAft>
+                        <a:buNone/>
+                      </a:pPr>
+                      <a:r>
+                        <a:rPr lang="fr-FR" sz="1000" kern="100">
+                          <a:effectLst/>
+                        </a:rPr>
+                        <a:t>0.43</a:t>
+                      </a:r>
+                      <a:endParaRPr lang="fr-FR" sz="1000" kern="100">
+                        <a:effectLst/>
+                        <a:latin typeface="Calibri" panose="020F0502020204030204" pitchFamily="34" charset="0"/>
+                        <a:ea typeface="Calibri" panose="020F0502020204030204" pitchFamily="34" charset="0"/>
+                        <a:cs typeface="Times New Roman" panose="02020603050405020304" pitchFamily="18" charset="0"/>
+                      </a:endParaRPr>
+                    </a:p>
+                  </a:txBody>
+                  <a:tcPr marL="61854" marR="61854" marT="0" marB="0"/>
+                </a:tc>
+                <a:extLst>
+                  <a:ext uri="{0D108BD9-81ED-4DB2-BD59-A6C34878D82A}">
+                    <a16:rowId xmlns:a16="http://schemas.microsoft.com/office/drawing/2014/main" val="370379985"/>
+                  </a:ext>
+                </a:extLst>
+              </a:tr>
+              <a:tr h="139175">
+                <a:tc>
+                  <a:txBody>
+                    <a:bodyPr/>
+                    <a:lstStyle/>
+                    <a:p>
+                      <a:pPr>
+                        <a:lnSpc>
+                          <a:spcPct val="107000"/>
+                        </a:lnSpc>
+                        <a:spcAft>
+                          <a:spcPts val="800"/>
+                        </a:spcAft>
+                        <a:buNone/>
+                      </a:pPr>
+                      <a:r>
+                        <a:rPr lang="fr-FR" sz="1000" kern="100">
+                          <a:effectLst/>
+                        </a:rPr>
+                        <a:t>12</a:t>
+                      </a:r>
+                      <a:endParaRPr lang="fr-FR" sz="1000" kern="100">
+                        <a:effectLst/>
+                        <a:latin typeface="Calibri" panose="020F0502020204030204" pitchFamily="34" charset="0"/>
+                        <a:ea typeface="Calibri" panose="020F0502020204030204" pitchFamily="34" charset="0"/>
+                        <a:cs typeface="Times New Roman" panose="02020603050405020304" pitchFamily="18" charset="0"/>
+                      </a:endParaRPr>
+                    </a:p>
+                  </a:txBody>
+                  <a:tcPr marL="61854" marR="61854" marT="0" marB="0"/>
+                </a:tc>
+                <a:tc>
+                  <a:txBody>
+                    <a:bodyPr/>
+                    <a:lstStyle/>
+                    <a:p>
+                      <a:pPr>
+                        <a:lnSpc>
+                          <a:spcPct val="107000"/>
+                        </a:lnSpc>
+                        <a:spcAft>
+                          <a:spcPts val="800"/>
+                        </a:spcAft>
+                        <a:buNone/>
+                      </a:pPr>
+                      <a:r>
+                        <a:rPr lang="fr-FR" sz="1000" kern="100">
+                          <a:effectLst/>
+                        </a:rPr>
+                        <a:t>Jambe droite</a:t>
+                      </a:r>
+                      <a:endParaRPr lang="fr-FR" sz="1000" kern="100">
+                        <a:effectLst/>
+                        <a:latin typeface="Calibri" panose="020F0502020204030204" pitchFamily="34" charset="0"/>
+                        <a:ea typeface="Calibri" panose="020F0502020204030204" pitchFamily="34" charset="0"/>
+                        <a:cs typeface="Times New Roman" panose="02020603050405020304" pitchFamily="18" charset="0"/>
+                      </a:endParaRPr>
+                    </a:p>
+                  </a:txBody>
+                  <a:tcPr marL="61854" marR="61854" marT="0" marB="0"/>
+                </a:tc>
+                <a:tc>
+                  <a:txBody>
+                    <a:bodyPr/>
+                    <a:lstStyle/>
+                    <a:p>
+                      <a:pPr>
+                        <a:lnSpc>
+                          <a:spcPct val="107000"/>
+                        </a:lnSpc>
+                        <a:spcAft>
+                          <a:spcPts val="800"/>
+                        </a:spcAft>
+                        <a:buNone/>
+                      </a:pPr>
+                      <a:r>
+                        <a:rPr lang="fr-FR" sz="1000" kern="100">
+                          <a:effectLst/>
+                        </a:rPr>
+                        <a:t>0.81</a:t>
+                      </a:r>
+                      <a:endParaRPr lang="fr-FR" sz="1000" kern="100">
+                        <a:effectLst/>
+                        <a:latin typeface="Calibri" panose="020F0502020204030204" pitchFamily="34" charset="0"/>
+                        <a:ea typeface="Calibri" panose="020F0502020204030204" pitchFamily="34" charset="0"/>
+                        <a:cs typeface="Times New Roman" panose="02020603050405020304" pitchFamily="18" charset="0"/>
+                      </a:endParaRPr>
+                    </a:p>
+                  </a:txBody>
+                  <a:tcPr marL="61854" marR="61854" marT="0" marB="0"/>
+                </a:tc>
+                <a:tc>
+                  <a:txBody>
+                    <a:bodyPr/>
+                    <a:lstStyle/>
+                    <a:p>
+                      <a:pPr>
+                        <a:lnSpc>
+                          <a:spcPct val="107000"/>
+                        </a:lnSpc>
+                        <a:spcAft>
+                          <a:spcPts val="800"/>
+                        </a:spcAft>
+                        <a:buNone/>
+                      </a:pPr>
+                      <a:r>
+                        <a:rPr lang="fr-FR" sz="1000" kern="100">
+                          <a:effectLst/>
+                        </a:rPr>
+                        <a:t>0.24</a:t>
+                      </a:r>
+                      <a:endParaRPr lang="fr-FR" sz="1000" kern="100">
+                        <a:effectLst/>
+                        <a:latin typeface="Calibri" panose="020F0502020204030204" pitchFamily="34" charset="0"/>
+                        <a:ea typeface="Calibri" panose="020F0502020204030204" pitchFamily="34" charset="0"/>
+                        <a:cs typeface="Times New Roman" panose="02020603050405020304" pitchFamily="18" charset="0"/>
+                      </a:endParaRPr>
+                    </a:p>
+                  </a:txBody>
+                  <a:tcPr marL="61854" marR="61854" marT="0" marB="0"/>
+                </a:tc>
+                <a:extLst>
+                  <a:ext uri="{0D108BD9-81ED-4DB2-BD59-A6C34878D82A}">
+                    <a16:rowId xmlns:a16="http://schemas.microsoft.com/office/drawing/2014/main" val="563538528"/>
+                  </a:ext>
+                </a:extLst>
+              </a:tr>
+              <a:tr h="139175">
+                <a:tc>
+                  <a:txBody>
+                    <a:bodyPr/>
+                    <a:lstStyle/>
+                    <a:p>
+                      <a:pPr>
+                        <a:lnSpc>
+                          <a:spcPct val="107000"/>
+                        </a:lnSpc>
+                        <a:spcAft>
+                          <a:spcPts val="800"/>
+                        </a:spcAft>
+                        <a:buNone/>
+                      </a:pPr>
+                      <a:r>
+                        <a:rPr lang="fr-FR" sz="1000" kern="100">
+                          <a:effectLst/>
+                        </a:rPr>
+                        <a:t>13</a:t>
+                      </a:r>
+                      <a:endParaRPr lang="fr-FR" sz="1000" kern="100">
+                        <a:effectLst/>
+                        <a:latin typeface="Calibri" panose="020F0502020204030204" pitchFamily="34" charset="0"/>
+                        <a:ea typeface="Calibri" panose="020F0502020204030204" pitchFamily="34" charset="0"/>
+                        <a:cs typeface="Times New Roman" panose="02020603050405020304" pitchFamily="18" charset="0"/>
+                      </a:endParaRPr>
+                    </a:p>
+                  </a:txBody>
+                  <a:tcPr marL="61854" marR="61854" marT="0" marB="0"/>
+                </a:tc>
+                <a:tc>
+                  <a:txBody>
+                    <a:bodyPr/>
+                    <a:lstStyle/>
+                    <a:p>
+                      <a:pPr>
+                        <a:lnSpc>
+                          <a:spcPct val="107000"/>
+                        </a:lnSpc>
+                        <a:spcAft>
+                          <a:spcPts val="800"/>
+                        </a:spcAft>
+                        <a:buNone/>
+                      </a:pPr>
+                      <a:r>
+                        <a:rPr lang="fr-FR" sz="1000" kern="100">
+                          <a:effectLst/>
+                        </a:rPr>
+                        <a:t>Bras gauche</a:t>
+                      </a:r>
+                      <a:endParaRPr lang="fr-FR" sz="1000" kern="100">
+                        <a:effectLst/>
+                        <a:latin typeface="Calibri" panose="020F0502020204030204" pitchFamily="34" charset="0"/>
+                        <a:ea typeface="Calibri" panose="020F0502020204030204" pitchFamily="34" charset="0"/>
+                        <a:cs typeface="Times New Roman" panose="02020603050405020304" pitchFamily="18" charset="0"/>
+                      </a:endParaRPr>
+                    </a:p>
+                  </a:txBody>
+                  <a:tcPr marL="61854" marR="61854" marT="0" marB="0"/>
+                </a:tc>
+                <a:tc>
+                  <a:txBody>
+                    <a:bodyPr/>
+                    <a:lstStyle/>
+                    <a:p>
+                      <a:pPr>
+                        <a:lnSpc>
+                          <a:spcPct val="107000"/>
+                        </a:lnSpc>
+                        <a:spcAft>
+                          <a:spcPts val="800"/>
+                        </a:spcAft>
+                        <a:buNone/>
+                      </a:pPr>
+                      <a:r>
+                        <a:rPr lang="fr-FR" sz="1000" kern="100">
+                          <a:effectLst/>
+                        </a:rPr>
+                        <a:t>0.74</a:t>
+                      </a:r>
+                      <a:endParaRPr lang="fr-FR" sz="1000" kern="100">
+                        <a:effectLst/>
+                        <a:latin typeface="Calibri" panose="020F0502020204030204" pitchFamily="34" charset="0"/>
+                        <a:ea typeface="Calibri" panose="020F0502020204030204" pitchFamily="34" charset="0"/>
+                        <a:cs typeface="Times New Roman" panose="02020603050405020304" pitchFamily="18" charset="0"/>
+                      </a:endParaRPr>
+                    </a:p>
+                  </a:txBody>
+                  <a:tcPr marL="61854" marR="61854" marT="0" marB="0"/>
+                </a:tc>
+                <a:tc>
+                  <a:txBody>
+                    <a:bodyPr/>
+                    <a:lstStyle/>
+                    <a:p>
+                      <a:pPr>
+                        <a:lnSpc>
+                          <a:spcPct val="107000"/>
+                        </a:lnSpc>
+                        <a:spcAft>
+                          <a:spcPts val="800"/>
+                        </a:spcAft>
+                        <a:buNone/>
+                      </a:pPr>
+                      <a:r>
+                        <a:rPr lang="fr-FR" sz="1000" kern="100">
+                          <a:effectLst/>
+                        </a:rPr>
+                        <a:t>0.35</a:t>
+                      </a:r>
+                      <a:endParaRPr lang="fr-FR" sz="1000" kern="100">
+                        <a:effectLst/>
+                        <a:latin typeface="Calibri" panose="020F0502020204030204" pitchFamily="34" charset="0"/>
+                        <a:ea typeface="Calibri" panose="020F0502020204030204" pitchFamily="34" charset="0"/>
+                        <a:cs typeface="Times New Roman" panose="02020603050405020304" pitchFamily="18" charset="0"/>
+                      </a:endParaRPr>
+                    </a:p>
+                  </a:txBody>
+                  <a:tcPr marL="61854" marR="61854" marT="0" marB="0"/>
+                </a:tc>
+                <a:extLst>
+                  <a:ext uri="{0D108BD9-81ED-4DB2-BD59-A6C34878D82A}">
+                    <a16:rowId xmlns:a16="http://schemas.microsoft.com/office/drawing/2014/main" val="824552600"/>
+                  </a:ext>
+                </a:extLst>
+              </a:tr>
+              <a:tr h="139175">
+                <a:tc>
+                  <a:txBody>
+                    <a:bodyPr/>
+                    <a:lstStyle/>
+                    <a:p>
+                      <a:pPr>
+                        <a:lnSpc>
+                          <a:spcPct val="107000"/>
+                        </a:lnSpc>
+                        <a:spcAft>
+                          <a:spcPts val="800"/>
+                        </a:spcAft>
+                        <a:buNone/>
+                      </a:pPr>
+                      <a:r>
+                        <a:rPr lang="fr-FR" sz="1000" kern="100">
+                          <a:effectLst/>
+                        </a:rPr>
+                        <a:t>14</a:t>
+                      </a:r>
+                      <a:endParaRPr lang="fr-FR" sz="1000" kern="100">
+                        <a:effectLst/>
+                        <a:latin typeface="Calibri" panose="020F0502020204030204" pitchFamily="34" charset="0"/>
+                        <a:ea typeface="Calibri" panose="020F0502020204030204" pitchFamily="34" charset="0"/>
+                        <a:cs typeface="Times New Roman" panose="02020603050405020304" pitchFamily="18" charset="0"/>
+                      </a:endParaRPr>
+                    </a:p>
+                  </a:txBody>
+                  <a:tcPr marL="61854" marR="61854" marT="0" marB="0"/>
+                </a:tc>
+                <a:tc>
+                  <a:txBody>
+                    <a:bodyPr/>
+                    <a:lstStyle/>
+                    <a:p>
+                      <a:pPr>
+                        <a:lnSpc>
+                          <a:spcPct val="107000"/>
+                        </a:lnSpc>
+                        <a:spcAft>
+                          <a:spcPts val="800"/>
+                        </a:spcAft>
+                        <a:buNone/>
+                      </a:pPr>
+                      <a:r>
+                        <a:rPr lang="fr-FR" sz="1000" kern="100">
+                          <a:effectLst/>
+                        </a:rPr>
+                        <a:t>Bras Droit </a:t>
+                      </a:r>
+                      <a:endParaRPr lang="fr-FR" sz="1000" kern="100">
+                        <a:effectLst/>
+                        <a:latin typeface="Calibri" panose="020F0502020204030204" pitchFamily="34" charset="0"/>
+                        <a:ea typeface="Calibri" panose="020F0502020204030204" pitchFamily="34" charset="0"/>
+                        <a:cs typeface="Times New Roman" panose="02020603050405020304" pitchFamily="18" charset="0"/>
+                      </a:endParaRPr>
+                    </a:p>
+                  </a:txBody>
+                  <a:tcPr marL="61854" marR="61854" marT="0" marB="0"/>
+                </a:tc>
+                <a:tc>
+                  <a:txBody>
+                    <a:bodyPr/>
+                    <a:lstStyle/>
+                    <a:p>
+                      <a:pPr>
+                        <a:lnSpc>
+                          <a:spcPct val="107000"/>
+                        </a:lnSpc>
+                        <a:spcAft>
+                          <a:spcPts val="800"/>
+                        </a:spcAft>
+                        <a:buNone/>
+                      </a:pPr>
+                      <a:r>
+                        <a:rPr lang="fr-FR" sz="1000" kern="100">
+                          <a:effectLst/>
+                        </a:rPr>
+                        <a:t>0.73</a:t>
+                      </a:r>
+                      <a:endParaRPr lang="fr-FR" sz="1000" kern="100">
+                        <a:effectLst/>
+                        <a:latin typeface="Calibri" panose="020F0502020204030204" pitchFamily="34" charset="0"/>
+                        <a:ea typeface="Calibri" panose="020F0502020204030204" pitchFamily="34" charset="0"/>
+                        <a:cs typeface="Times New Roman" panose="02020603050405020304" pitchFamily="18" charset="0"/>
+                      </a:endParaRPr>
+                    </a:p>
+                  </a:txBody>
+                  <a:tcPr marL="61854" marR="61854" marT="0" marB="0"/>
+                </a:tc>
+                <a:tc>
+                  <a:txBody>
+                    <a:bodyPr/>
+                    <a:lstStyle/>
+                    <a:p>
+                      <a:pPr>
+                        <a:lnSpc>
+                          <a:spcPct val="107000"/>
+                        </a:lnSpc>
+                        <a:spcAft>
+                          <a:spcPts val="800"/>
+                        </a:spcAft>
+                        <a:buNone/>
+                      </a:pPr>
+                      <a:r>
+                        <a:rPr lang="fr-FR" sz="1000" kern="100">
+                          <a:effectLst/>
+                        </a:rPr>
+                        <a:t>0.34</a:t>
+                      </a:r>
+                      <a:endParaRPr lang="fr-FR" sz="1000" kern="100">
+                        <a:effectLst/>
+                        <a:latin typeface="Calibri" panose="020F0502020204030204" pitchFamily="34" charset="0"/>
+                        <a:ea typeface="Calibri" panose="020F0502020204030204" pitchFamily="34" charset="0"/>
+                        <a:cs typeface="Times New Roman" panose="02020603050405020304" pitchFamily="18" charset="0"/>
+                      </a:endParaRPr>
+                    </a:p>
+                  </a:txBody>
+                  <a:tcPr marL="61854" marR="61854" marT="0" marB="0"/>
+                </a:tc>
+                <a:extLst>
+                  <a:ext uri="{0D108BD9-81ED-4DB2-BD59-A6C34878D82A}">
+                    <a16:rowId xmlns:a16="http://schemas.microsoft.com/office/drawing/2014/main" val="1245688315"/>
+                  </a:ext>
+                </a:extLst>
+              </a:tr>
+              <a:tr h="139175">
+                <a:tc>
+                  <a:txBody>
+                    <a:bodyPr/>
+                    <a:lstStyle/>
+                    <a:p>
+                      <a:pPr>
+                        <a:lnSpc>
+                          <a:spcPct val="107000"/>
+                        </a:lnSpc>
+                        <a:spcAft>
+                          <a:spcPts val="800"/>
+                        </a:spcAft>
+                        <a:buNone/>
+                      </a:pPr>
+                      <a:r>
+                        <a:rPr lang="fr-FR" sz="1000" kern="100">
+                          <a:effectLst/>
+                        </a:rPr>
+                        <a:t>15</a:t>
+                      </a:r>
+                      <a:endParaRPr lang="fr-FR" sz="1000" kern="100">
+                        <a:effectLst/>
+                        <a:latin typeface="Calibri" panose="020F0502020204030204" pitchFamily="34" charset="0"/>
+                        <a:ea typeface="Calibri" panose="020F0502020204030204" pitchFamily="34" charset="0"/>
+                        <a:cs typeface="Times New Roman" panose="02020603050405020304" pitchFamily="18" charset="0"/>
+                      </a:endParaRPr>
+                    </a:p>
+                  </a:txBody>
+                  <a:tcPr marL="61854" marR="61854" marT="0" marB="0"/>
+                </a:tc>
+                <a:tc>
+                  <a:txBody>
+                    <a:bodyPr/>
+                    <a:lstStyle/>
+                    <a:p>
+                      <a:pPr>
+                        <a:lnSpc>
+                          <a:spcPct val="107000"/>
+                        </a:lnSpc>
+                        <a:spcAft>
+                          <a:spcPts val="800"/>
+                        </a:spcAft>
+                        <a:buNone/>
+                      </a:pPr>
+                      <a:r>
+                        <a:rPr lang="fr-FR" sz="1000" kern="100">
+                          <a:effectLst/>
+                        </a:rPr>
+                        <a:t>Sac</a:t>
+                      </a:r>
+                      <a:endParaRPr lang="fr-FR" sz="1000" kern="100">
+                        <a:effectLst/>
+                        <a:latin typeface="Calibri" panose="020F0502020204030204" pitchFamily="34" charset="0"/>
+                        <a:ea typeface="Calibri" panose="020F0502020204030204" pitchFamily="34" charset="0"/>
+                        <a:cs typeface="Times New Roman" panose="02020603050405020304" pitchFamily="18" charset="0"/>
+                      </a:endParaRPr>
+                    </a:p>
+                  </a:txBody>
+                  <a:tcPr marL="61854" marR="61854" marT="0" marB="0"/>
+                </a:tc>
+                <a:tc>
+                  <a:txBody>
+                    <a:bodyPr/>
+                    <a:lstStyle/>
+                    <a:p>
+                      <a:pPr>
+                        <a:lnSpc>
+                          <a:spcPct val="107000"/>
+                        </a:lnSpc>
+                        <a:spcAft>
+                          <a:spcPts val="800"/>
+                        </a:spcAft>
+                        <a:buNone/>
+                      </a:pPr>
+                      <a:r>
+                        <a:rPr lang="fr-FR" sz="1000" kern="100">
+                          <a:effectLst/>
+                        </a:rPr>
+                        <a:t>0.84</a:t>
+                      </a:r>
+                      <a:endParaRPr lang="fr-FR" sz="1000" kern="100">
+                        <a:effectLst/>
+                        <a:latin typeface="Calibri" panose="020F0502020204030204" pitchFamily="34" charset="0"/>
+                        <a:ea typeface="Calibri" panose="020F0502020204030204" pitchFamily="34" charset="0"/>
+                        <a:cs typeface="Times New Roman" panose="02020603050405020304" pitchFamily="18" charset="0"/>
+                      </a:endParaRPr>
+                    </a:p>
+                  </a:txBody>
+                  <a:tcPr marL="61854" marR="61854" marT="0" marB="0"/>
+                </a:tc>
+                <a:tc>
+                  <a:txBody>
+                    <a:bodyPr/>
+                    <a:lstStyle/>
+                    <a:p>
+                      <a:pPr>
+                        <a:lnSpc>
+                          <a:spcPct val="107000"/>
+                        </a:lnSpc>
+                        <a:spcAft>
+                          <a:spcPts val="800"/>
+                        </a:spcAft>
+                        <a:buNone/>
+                      </a:pPr>
+                      <a:r>
+                        <a:rPr lang="fr-FR" sz="1000" kern="100">
+                          <a:effectLst/>
+                        </a:rPr>
+                        <a:t>0.74</a:t>
+                      </a:r>
+                      <a:endParaRPr lang="fr-FR" sz="1000" kern="100">
+                        <a:effectLst/>
+                        <a:latin typeface="Calibri" panose="020F0502020204030204" pitchFamily="34" charset="0"/>
+                        <a:ea typeface="Calibri" panose="020F0502020204030204" pitchFamily="34" charset="0"/>
+                        <a:cs typeface="Times New Roman" panose="02020603050405020304" pitchFamily="18" charset="0"/>
+                      </a:endParaRPr>
+                    </a:p>
+                  </a:txBody>
+                  <a:tcPr marL="61854" marR="61854" marT="0" marB="0"/>
+                </a:tc>
+                <a:extLst>
+                  <a:ext uri="{0D108BD9-81ED-4DB2-BD59-A6C34878D82A}">
+                    <a16:rowId xmlns:a16="http://schemas.microsoft.com/office/drawing/2014/main" val="2797344088"/>
+                  </a:ext>
+                </a:extLst>
+              </a:tr>
+              <a:tr h="139175">
+                <a:tc>
+                  <a:txBody>
+                    <a:bodyPr/>
+                    <a:lstStyle/>
+                    <a:p>
+                      <a:pPr>
+                        <a:lnSpc>
+                          <a:spcPct val="107000"/>
+                        </a:lnSpc>
+                        <a:spcAft>
+                          <a:spcPts val="800"/>
+                        </a:spcAft>
+                        <a:buNone/>
+                      </a:pPr>
+                      <a:r>
+                        <a:rPr lang="fr-FR" sz="1000" kern="100">
+                          <a:effectLst/>
+                        </a:rPr>
+                        <a:t>16</a:t>
+                      </a:r>
+                      <a:endParaRPr lang="fr-FR" sz="1000" kern="100">
+                        <a:effectLst/>
+                        <a:latin typeface="Calibri" panose="020F0502020204030204" pitchFamily="34" charset="0"/>
+                        <a:ea typeface="Calibri" panose="020F0502020204030204" pitchFamily="34" charset="0"/>
+                        <a:cs typeface="Times New Roman" panose="02020603050405020304" pitchFamily="18" charset="0"/>
+                      </a:endParaRPr>
+                    </a:p>
+                  </a:txBody>
+                  <a:tcPr marL="61854" marR="61854" marT="0" marB="0"/>
+                </a:tc>
+                <a:tc>
+                  <a:txBody>
+                    <a:bodyPr/>
+                    <a:lstStyle/>
+                    <a:p>
+                      <a:pPr>
+                        <a:lnSpc>
+                          <a:spcPct val="107000"/>
+                        </a:lnSpc>
+                        <a:spcAft>
+                          <a:spcPts val="800"/>
+                        </a:spcAft>
+                        <a:buNone/>
+                      </a:pPr>
+                      <a:r>
+                        <a:rPr lang="fr-FR" sz="1000" kern="100">
+                          <a:effectLst/>
+                        </a:rPr>
+                        <a:t>Echarpe</a:t>
+                      </a:r>
+                      <a:endParaRPr lang="fr-FR" sz="1000" kern="100">
+                        <a:effectLst/>
+                        <a:latin typeface="Calibri" panose="020F0502020204030204" pitchFamily="34" charset="0"/>
+                        <a:ea typeface="Calibri" panose="020F0502020204030204" pitchFamily="34" charset="0"/>
+                        <a:cs typeface="Times New Roman" panose="02020603050405020304" pitchFamily="18" charset="0"/>
+                      </a:endParaRPr>
+                    </a:p>
+                  </a:txBody>
+                  <a:tcPr marL="61854" marR="61854" marT="0" marB="0"/>
+                </a:tc>
+                <a:tc>
+                  <a:txBody>
+                    <a:bodyPr/>
+                    <a:lstStyle/>
+                    <a:p>
+                      <a:pPr>
+                        <a:lnSpc>
+                          <a:spcPct val="107000"/>
+                        </a:lnSpc>
+                        <a:spcAft>
+                          <a:spcPts val="800"/>
+                        </a:spcAft>
+                        <a:buNone/>
+                      </a:pPr>
+                      <a:r>
+                        <a:rPr lang="fr-FR" sz="1000" kern="100">
+                          <a:effectLst/>
+                        </a:rPr>
+                        <a:t>0.29</a:t>
+                      </a:r>
+                      <a:endParaRPr lang="fr-FR" sz="1000" kern="100">
+                        <a:effectLst/>
+                        <a:latin typeface="Calibri" panose="020F0502020204030204" pitchFamily="34" charset="0"/>
+                        <a:ea typeface="Calibri" panose="020F0502020204030204" pitchFamily="34" charset="0"/>
+                        <a:cs typeface="Times New Roman" panose="02020603050405020304" pitchFamily="18" charset="0"/>
+                      </a:endParaRPr>
+                    </a:p>
+                  </a:txBody>
+                  <a:tcPr marL="61854" marR="61854" marT="0" marB="0"/>
+                </a:tc>
+                <a:tc>
+                  <a:txBody>
+                    <a:bodyPr/>
+                    <a:lstStyle/>
+                    <a:p>
+                      <a:pPr>
+                        <a:lnSpc>
+                          <a:spcPct val="107000"/>
+                        </a:lnSpc>
+                        <a:spcAft>
+                          <a:spcPts val="800"/>
+                        </a:spcAft>
+                        <a:buNone/>
+                      </a:pPr>
+                      <a:r>
+                        <a:rPr lang="fr-FR" sz="1000" kern="100">
+                          <a:effectLst/>
+                        </a:rPr>
+                        <a:t>0.82</a:t>
+                      </a:r>
+                      <a:endParaRPr lang="fr-FR" sz="1000" kern="100">
+                        <a:effectLst/>
+                        <a:latin typeface="Calibri" panose="020F0502020204030204" pitchFamily="34" charset="0"/>
+                        <a:ea typeface="Calibri" panose="020F0502020204030204" pitchFamily="34" charset="0"/>
+                        <a:cs typeface="Times New Roman" panose="02020603050405020304" pitchFamily="18" charset="0"/>
+                      </a:endParaRPr>
+                    </a:p>
+                  </a:txBody>
+                  <a:tcPr marL="61854" marR="61854" marT="0" marB="0"/>
+                </a:tc>
+                <a:extLst>
+                  <a:ext uri="{0D108BD9-81ED-4DB2-BD59-A6C34878D82A}">
+                    <a16:rowId xmlns:a16="http://schemas.microsoft.com/office/drawing/2014/main" val="2418888451"/>
+                  </a:ext>
+                </a:extLst>
+              </a:tr>
+              <a:tr h="285770">
+                <a:tc>
+                  <a:txBody>
+                    <a:bodyPr/>
+                    <a:lstStyle/>
+                    <a:p>
+                      <a:pPr>
+                        <a:lnSpc>
+                          <a:spcPct val="107000"/>
+                        </a:lnSpc>
+                        <a:spcAft>
+                          <a:spcPts val="800"/>
+                        </a:spcAft>
+                        <a:buNone/>
+                      </a:pPr>
+                      <a:r>
+                        <a:rPr lang="fr-FR" sz="1000" kern="100">
+                          <a:effectLst/>
+                        </a:rPr>
+                        <a:t>mIoU (All Classes)</a:t>
+                      </a:r>
+                      <a:endParaRPr lang="fr-FR" sz="1000" kern="100">
+                        <a:effectLst/>
+                        <a:latin typeface="Calibri" panose="020F0502020204030204" pitchFamily="34" charset="0"/>
+                        <a:ea typeface="Calibri" panose="020F0502020204030204" pitchFamily="34" charset="0"/>
+                        <a:cs typeface="Times New Roman" panose="02020603050405020304" pitchFamily="18" charset="0"/>
+                      </a:endParaRPr>
+                    </a:p>
+                  </a:txBody>
+                  <a:tcPr marL="61854" marR="61854" marT="0" marB="0"/>
+                </a:tc>
+                <a:tc>
+                  <a:txBody>
+                    <a:bodyPr/>
+                    <a:lstStyle/>
+                    <a:p>
+                      <a:pPr>
+                        <a:lnSpc>
+                          <a:spcPct val="107000"/>
+                        </a:lnSpc>
+                        <a:spcAft>
+                          <a:spcPts val="800"/>
+                        </a:spcAft>
+                        <a:buNone/>
+                      </a:pPr>
+                      <a:r>
+                        <a:rPr lang="fr-FR" sz="1000" kern="100">
+                          <a:effectLst/>
+                        </a:rPr>
+                        <a:t> </a:t>
+                      </a:r>
+                      <a:endParaRPr lang="fr-FR" sz="1000" kern="100">
+                        <a:effectLst/>
+                        <a:latin typeface="Calibri" panose="020F0502020204030204" pitchFamily="34" charset="0"/>
+                        <a:ea typeface="Calibri" panose="020F0502020204030204" pitchFamily="34" charset="0"/>
+                        <a:cs typeface="Times New Roman" panose="02020603050405020304" pitchFamily="18" charset="0"/>
+                      </a:endParaRPr>
+                    </a:p>
+                  </a:txBody>
+                  <a:tcPr marL="61854" marR="61854" marT="0" marB="0"/>
+                </a:tc>
+                <a:tc>
+                  <a:txBody>
+                    <a:bodyPr/>
+                    <a:lstStyle/>
+                    <a:p>
+                      <a:pPr>
+                        <a:lnSpc>
+                          <a:spcPct val="107000"/>
+                        </a:lnSpc>
+                        <a:spcAft>
+                          <a:spcPts val="800"/>
+                        </a:spcAft>
+                        <a:buNone/>
+                      </a:pPr>
+                      <a:r>
+                        <a:rPr lang="fr-FR" sz="1000" kern="100" dirty="0">
+                          <a:effectLst/>
+                        </a:rPr>
+                        <a:t>0.69</a:t>
+                      </a:r>
+                      <a:endParaRPr lang="fr-FR" sz="1000" kern="100" dirty="0">
+                        <a:effectLst/>
+                        <a:latin typeface="Calibri" panose="020F0502020204030204" pitchFamily="34" charset="0"/>
+                        <a:ea typeface="Calibri" panose="020F0502020204030204" pitchFamily="34" charset="0"/>
+                        <a:cs typeface="Times New Roman" panose="02020603050405020304" pitchFamily="18" charset="0"/>
+                      </a:endParaRPr>
+                    </a:p>
+                  </a:txBody>
+                  <a:tcPr marL="61854" marR="61854" marT="0" marB="0"/>
+                </a:tc>
+                <a:tc>
+                  <a:txBody>
+                    <a:bodyPr/>
+                    <a:lstStyle/>
+                    <a:p>
+                      <a:pPr>
+                        <a:lnSpc>
+                          <a:spcPct val="107000"/>
+                        </a:lnSpc>
+                        <a:spcAft>
+                          <a:spcPts val="800"/>
+                        </a:spcAft>
+                        <a:buNone/>
+                      </a:pPr>
+                      <a:r>
+                        <a:rPr lang="fr-FR" sz="1000" kern="100">
+                          <a:effectLst/>
+                        </a:rPr>
+                        <a:t>0.70</a:t>
+                      </a:r>
+                      <a:endParaRPr lang="fr-FR" sz="1000" kern="100">
+                        <a:effectLst/>
+                        <a:latin typeface="Calibri" panose="020F0502020204030204" pitchFamily="34" charset="0"/>
+                        <a:ea typeface="Calibri" panose="020F0502020204030204" pitchFamily="34" charset="0"/>
+                        <a:cs typeface="Times New Roman" panose="02020603050405020304" pitchFamily="18" charset="0"/>
+                      </a:endParaRPr>
+                    </a:p>
+                  </a:txBody>
+                  <a:tcPr marL="61854" marR="61854" marT="0" marB="0"/>
+                </a:tc>
+                <a:extLst>
+                  <a:ext uri="{0D108BD9-81ED-4DB2-BD59-A6C34878D82A}">
+                    <a16:rowId xmlns:a16="http://schemas.microsoft.com/office/drawing/2014/main" val="3849783798"/>
+                  </a:ext>
+                </a:extLst>
+              </a:tr>
+              <a:tr h="285770">
+                <a:tc>
+                  <a:txBody>
+                    <a:bodyPr/>
+                    <a:lstStyle/>
+                    <a:p>
+                      <a:pPr>
+                        <a:lnSpc>
+                          <a:spcPct val="107000"/>
+                        </a:lnSpc>
+                        <a:spcAft>
+                          <a:spcPts val="800"/>
+                        </a:spcAft>
+                        <a:buNone/>
+                      </a:pPr>
+                      <a:r>
+                        <a:rPr lang="fr-FR" sz="1000" kern="100">
+                          <a:effectLst/>
+                        </a:rPr>
+                        <a:t>mIoU (Without Background)</a:t>
+                      </a:r>
+                      <a:endParaRPr lang="fr-FR" sz="1000" kern="100">
+                        <a:effectLst/>
+                        <a:latin typeface="Calibri" panose="020F0502020204030204" pitchFamily="34" charset="0"/>
+                        <a:ea typeface="Calibri" panose="020F0502020204030204" pitchFamily="34" charset="0"/>
+                        <a:cs typeface="Times New Roman" panose="02020603050405020304" pitchFamily="18" charset="0"/>
+                      </a:endParaRPr>
+                    </a:p>
+                  </a:txBody>
+                  <a:tcPr marL="61854" marR="61854" marT="0" marB="0"/>
+                </a:tc>
+                <a:tc>
+                  <a:txBody>
+                    <a:bodyPr/>
+                    <a:lstStyle/>
+                    <a:p>
+                      <a:pPr>
+                        <a:lnSpc>
+                          <a:spcPct val="107000"/>
+                        </a:lnSpc>
+                        <a:spcAft>
+                          <a:spcPts val="800"/>
+                        </a:spcAft>
+                        <a:buNone/>
+                      </a:pPr>
+                      <a:r>
+                        <a:rPr lang="fr-FR" sz="1000" kern="100">
+                          <a:effectLst/>
+                        </a:rPr>
+                        <a:t> </a:t>
+                      </a:r>
+                      <a:endParaRPr lang="fr-FR" sz="1000" kern="100">
+                        <a:effectLst/>
+                        <a:latin typeface="Calibri" panose="020F0502020204030204" pitchFamily="34" charset="0"/>
+                        <a:ea typeface="Calibri" panose="020F0502020204030204" pitchFamily="34" charset="0"/>
+                        <a:cs typeface="Times New Roman" panose="02020603050405020304" pitchFamily="18" charset="0"/>
+                      </a:endParaRPr>
+                    </a:p>
+                  </a:txBody>
+                  <a:tcPr marL="61854" marR="61854" marT="0" marB="0"/>
+                </a:tc>
+                <a:tc>
+                  <a:txBody>
+                    <a:bodyPr/>
+                    <a:lstStyle/>
+                    <a:p>
+                      <a:pPr>
+                        <a:lnSpc>
+                          <a:spcPct val="107000"/>
+                        </a:lnSpc>
+                        <a:spcAft>
+                          <a:spcPts val="800"/>
+                        </a:spcAft>
+                        <a:buNone/>
+                      </a:pPr>
+                      <a:r>
+                        <a:rPr lang="fr-FR" sz="1000" kern="100">
+                          <a:effectLst/>
+                        </a:rPr>
+                        <a:t> </a:t>
+                      </a:r>
+                      <a:endParaRPr lang="fr-FR" sz="1000" kern="100">
+                        <a:effectLst/>
+                        <a:latin typeface="Calibri" panose="020F0502020204030204" pitchFamily="34" charset="0"/>
+                        <a:ea typeface="Calibri" panose="020F0502020204030204" pitchFamily="34" charset="0"/>
+                        <a:cs typeface="Times New Roman" panose="02020603050405020304" pitchFamily="18" charset="0"/>
+                      </a:endParaRPr>
+                    </a:p>
+                  </a:txBody>
+                  <a:tcPr marL="61854" marR="61854" marT="0" marB="0"/>
+                </a:tc>
+                <a:tc>
+                  <a:txBody>
+                    <a:bodyPr/>
+                    <a:lstStyle/>
+                    <a:p>
+                      <a:pPr>
+                        <a:lnSpc>
+                          <a:spcPct val="107000"/>
+                        </a:lnSpc>
+                        <a:spcAft>
+                          <a:spcPts val="800"/>
+                        </a:spcAft>
+                        <a:buNone/>
+                      </a:pPr>
+                      <a:r>
+                        <a:rPr lang="fr-FR" sz="1000" kern="100" dirty="0">
+                          <a:effectLst/>
+                        </a:rPr>
+                        <a:t>0.69</a:t>
+                      </a:r>
+                      <a:endParaRPr lang="fr-FR" sz="1000" kern="100" dirty="0">
+                        <a:effectLst/>
+                        <a:latin typeface="Calibri" panose="020F0502020204030204" pitchFamily="34" charset="0"/>
+                        <a:ea typeface="Calibri" panose="020F0502020204030204" pitchFamily="34" charset="0"/>
+                        <a:cs typeface="Times New Roman" panose="02020603050405020304" pitchFamily="18" charset="0"/>
+                      </a:endParaRPr>
+                    </a:p>
+                  </a:txBody>
+                  <a:tcPr marL="61854" marR="61854" marT="0" marB="0"/>
+                </a:tc>
+                <a:extLst>
+                  <a:ext uri="{0D108BD9-81ED-4DB2-BD59-A6C34878D82A}">
+                    <a16:rowId xmlns:a16="http://schemas.microsoft.com/office/drawing/2014/main" val="4068323979"/>
+                  </a:ext>
+                </a:extLst>
+              </a:tr>
+            </a:tbl>
+          </a:graphicData>
+        </a:graphic>
+      </p:graphicFrame>
+      <p:sp>
+        <p:nvSpPr>
+          <p:cNvPr id="6" name="ZoneTexte 5">
+            <a:extLst>
+              <a:ext uri="{FF2B5EF4-FFF2-40B4-BE49-F238E27FC236}">
+                <a16:creationId xmlns:a16="http://schemas.microsoft.com/office/drawing/2014/main" id="{F5FF22A8-01CC-9959-DD75-AB14D2399EC9}"/>
+              </a:ext>
+            </a:extLst>
+          </p:cNvPr>
+          <p:cNvSpPr txBox="1"/>
+          <p:nvPr/>
+        </p:nvSpPr>
+        <p:spPr>
+          <a:xfrm>
+            <a:off x="6005313" y="3905822"/>
+            <a:ext cx="2331087" cy="954107"/>
+          </a:xfrm>
+          <a:prstGeom prst="rect">
+            <a:avLst/>
+          </a:prstGeom>
+          <a:noFill/>
+        </p:spPr>
+        <p:txBody>
+          <a:bodyPr wrap="none" rtlCol="0">
+            <a:spAutoFit/>
+          </a:bodyPr>
+          <a:lstStyle/>
+          <a:p>
+            <a:r>
+              <a:rPr lang="fr-FR" dirty="0">
+                <a:solidFill>
+                  <a:schemeClr val="bg1"/>
+                </a:solidFill>
+                <a:latin typeface="Lato" panose="020F0502020204030203" pitchFamily="34" charset="0"/>
+                <a:ea typeface="Lato" panose="020F0502020204030203" pitchFamily="34" charset="0"/>
+                <a:cs typeface="Lato" panose="020F0502020204030203" pitchFamily="34" charset="0"/>
+              </a:rPr>
+              <a:t>Résultats sur </a:t>
+            </a:r>
+            <a:r>
+              <a:rPr lang="fr-FR" dirty="0">
+                <a:solidFill>
+                  <a:srgbClr val="FF0000"/>
+                </a:solidFill>
+                <a:latin typeface="Lato" panose="020F0502020204030203" pitchFamily="34" charset="0"/>
+                <a:ea typeface="Lato" panose="020F0502020204030203" pitchFamily="34" charset="0"/>
+                <a:cs typeface="Lato" panose="020F0502020204030203" pitchFamily="34" charset="0"/>
+              </a:rPr>
+              <a:t>50</a:t>
+            </a:r>
+            <a:r>
+              <a:rPr lang="fr-FR" dirty="0">
+                <a:solidFill>
+                  <a:schemeClr val="bg1"/>
+                </a:solidFill>
+                <a:latin typeface="Lato" panose="020F0502020204030203" pitchFamily="34" charset="0"/>
+                <a:ea typeface="Lato" panose="020F0502020204030203" pitchFamily="34" charset="0"/>
+                <a:cs typeface="Lato" panose="020F0502020204030203" pitchFamily="34" charset="0"/>
+              </a:rPr>
+              <a:t> images</a:t>
+            </a:r>
+          </a:p>
+          <a:p>
+            <a:r>
+              <a:rPr lang="fr-FR" dirty="0">
+                <a:solidFill>
+                  <a:schemeClr val="bg1"/>
+                </a:solidFill>
+                <a:latin typeface="Lato" panose="020F0502020204030203" pitchFamily="34" charset="0"/>
+                <a:ea typeface="Lato" panose="020F0502020204030203" pitchFamily="34" charset="0"/>
+                <a:cs typeface="Lato" panose="020F0502020204030203" pitchFamily="34" charset="0"/>
+              </a:rPr>
+              <a:t>légèrement supérieur pour </a:t>
+            </a:r>
+          </a:p>
+          <a:p>
+            <a:r>
+              <a:rPr lang="fr-FR" dirty="0">
+                <a:solidFill>
+                  <a:schemeClr val="bg1"/>
+                </a:solidFill>
+                <a:latin typeface="Lato" panose="020F0502020204030203" pitchFamily="34" charset="0"/>
+                <a:ea typeface="Lato" panose="020F0502020204030203" pitchFamily="34" charset="0"/>
+                <a:cs typeface="Lato" panose="020F0502020204030203" pitchFamily="34" charset="0"/>
+              </a:rPr>
+              <a:t>certaines classes </a:t>
+            </a:r>
+          </a:p>
+          <a:p>
+            <a:r>
+              <a:rPr lang="fr-FR" dirty="0">
+                <a:solidFill>
+                  <a:schemeClr val="bg1"/>
+                </a:solidFill>
+                <a:latin typeface="Lato" panose="020F0502020204030203" pitchFamily="34" charset="0"/>
+                <a:ea typeface="Lato" panose="020F0502020204030203" pitchFamily="34" charset="0"/>
+                <a:cs typeface="Lato" panose="020F0502020204030203" pitchFamily="34" charset="0"/>
+              </a:rPr>
+              <a:t>et </a:t>
+            </a:r>
+            <a:r>
+              <a:rPr lang="fr-FR" dirty="0">
+                <a:solidFill>
+                  <a:srgbClr val="FF0000"/>
+                </a:solidFill>
+                <a:latin typeface="Lato" panose="020F0502020204030203" pitchFamily="34" charset="0"/>
+                <a:ea typeface="Lato" panose="020F0502020204030203" pitchFamily="34" charset="0"/>
+                <a:cs typeface="Lato" panose="020F0502020204030203" pitchFamily="34" charset="0"/>
+              </a:rPr>
+              <a:t>conforme</a:t>
+            </a:r>
+            <a:r>
+              <a:rPr lang="fr-FR" dirty="0">
+                <a:solidFill>
+                  <a:schemeClr val="bg1"/>
+                </a:solidFill>
+                <a:latin typeface="Lato" panose="020F0502020204030203" pitchFamily="34" charset="0"/>
+                <a:ea typeface="Lato" panose="020F0502020204030203" pitchFamily="34" charset="0"/>
+                <a:cs typeface="Lato" panose="020F0502020204030203" pitchFamily="34" charset="0"/>
+              </a:rPr>
+              <a:t> au final </a:t>
+            </a:r>
+          </a:p>
+        </p:txBody>
+      </p:sp>
+    </p:spTree>
+    <p:extLst>
+      <p:ext uri="{BB962C8B-B14F-4D97-AF65-F5344CB8AC3E}">
+        <p14:creationId xmlns:p14="http://schemas.microsoft.com/office/powerpoint/2010/main" val="4113326625"/>
+      </p:ext>
+    </p:extLst>
+  </p:cSld>
+  <p:clrMapOvr>
+    <a:masterClrMapping/>
+  </p:clrMapOvr>
+</p:sld>
+</file>
+
+<file path=ppt/slides/slide7.xml><?xml version="1.0" encoding="utf-8"?>
+<p:sld xmlns:a="http://schemas.openxmlformats.org/drawingml/2006/main" xmlns:r="http://schemas.openxmlformats.org/officeDocument/2006/relationships" xmlns:p="http://schemas.openxmlformats.org/presentationml/2006/main">
+  <p:cSld>
+    <p:spTree>
+      <p:nvGrpSpPr>
         <p:cNvPr id="1" name="Shape 163"/>
         <p:cNvGrpSpPr/>
         <p:nvPr/>
@@ -11745,7 +14605,7 @@
 </p:sld>
 </file>
 
-<file path=ppt/slides/slide7.xml><?xml version="1.0" encoding="utf-8"?>
+<file path=ppt/slides/slide8.xml><?xml version="1.0" encoding="utf-8"?>
 <p:sld xmlns:a="http://schemas.openxmlformats.org/drawingml/2006/main" xmlns:r="http://schemas.openxmlformats.org/officeDocument/2006/relationships" xmlns:p="http://schemas.openxmlformats.org/presentationml/2006/main">
   <p:cSld>
     <p:spTree>
@@ -12013,7 +14873,7 @@
 </p:sld>
 </file>
 
-<file path=ppt/slides/slide8.xml><?xml version="1.0" encoding="utf-8"?>
+<file path=ppt/slides/slide9.xml><?xml version="1.0" encoding="utf-8"?>
 <p:sld xmlns:a="http://schemas.openxmlformats.org/drawingml/2006/main" xmlns:r="http://schemas.openxmlformats.org/officeDocument/2006/relationships" xmlns:p="http://schemas.openxmlformats.org/presentationml/2006/main">
   <p:cSld>
     <p:spTree>
@@ -12166,7 +15026,39 @@
                   <a:schemeClr val="bg1"/>
                 </a:solidFill>
               </a:rPr>
-              <a:t>Pertinence de la Méthode d’Evaluation du modèle </a:t>
+              <a:t>Pertinence de la Méthode d’Evaluation du modèle (</a:t>
+            </a:r>
+            <a:r>
+              <a:rPr lang="fr-FR" sz="2500" dirty="0" err="1">
+                <a:solidFill>
+                  <a:schemeClr val="bg1"/>
+                </a:solidFill>
+              </a:rPr>
+              <a:t>IoU</a:t>
+            </a:r>
+            <a:r>
+              <a:rPr lang="fr-FR" sz="2500" dirty="0">
+                <a:solidFill>
+                  <a:schemeClr val="bg1"/>
+                </a:solidFill>
+              </a:rPr>
+              <a:t>, Matrice de confusion…</a:t>
+            </a:r>
+            <a:r>
+              <a:rPr lang="fr-FR" sz="2500" dirty="0" err="1">
+                <a:solidFill>
+                  <a:schemeClr val="bg1"/>
+                </a:solidFill>
+              </a:rPr>
+              <a:t>etc</a:t>
+            </a:r>
+            <a:r>
+              <a:rPr lang="fr-FR" sz="2500" dirty="0">
+                <a:solidFill>
+                  <a:schemeClr val="bg1"/>
+                </a:solidFill>
+              </a:rPr>
+              <a:t>) </a:t>
             </a:r>
           </a:p>
           <a:p>
